--- a/01R/99_slides_with_code.pptx
+++ b/01R/99_slides_with_code.pptx
@@ -12,6 +12,9 @@
     <p:sldId id="260" r:id="rId6"/>
     <p:sldId id="261" r:id="rId7"/>
     <p:sldId id="262" r:id="rId8"/>
+    <p:sldId id="263" r:id="rId9"/>
+    <p:sldId id="264" r:id="rId10"/>
+    <p:sldId id="265" r:id="rId11"/>
   </p:sldIdLst>
   <p:sldSz cx="9144000" cy="5143500" type="screen16x9"/>
   <p:notesSz cx="6858000" cy="9144000"/>
@@ -3182,11 +3185,866 @@
             </a:pPr>
             <a:r>
               <a:rPr/>
-              <a:t>2025-05-31</a:t>
+              <a:t>2025-06-01</a:t>
             </a:r>
           </a:p>
         </p:txBody>
       </p:sp>
+    </p:spTree>
+  </p:cSld>
+</p:sld>
+</file>
+
+<file path=ppt/slides/slide10.xml><?xml version="1.0" encoding="utf-8"?>
+<p:sld xmlns:a="http://schemas.openxmlformats.org/drawingml/2006/main" xmlns:r="http://schemas.openxmlformats.org/officeDocument/2006/relationships" xmlns:p="http://schemas.openxmlformats.org/presentationml/2006/main">
+  <p:cSld>
+    <p:spTree>
+      <p:nvGrpSpPr>
+        <p:cNvPr id="1" name=""/>
+        <p:cNvGrpSpPr/>
+        <p:nvPr/>
+      </p:nvGrpSpPr>
+      <p:grpSpPr>
+        <a:xfrm>
+          <a:off x="0" y="0"/>
+          <a:ext cx="0" cy="0"/>
+          <a:chOff x="0" y="0"/>
+          <a:chExt cx="0" cy="0"/>
+        </a:xfrm>
+      </p:grpSpPr>
+      <p:sp>
+        <p:nvSpPr>
+          <p:cNvPr id="2" name="Title 1"/>
+          <p:cNvSpPr>
+            <a:spLocks noGrp="1"/>
+          </p:cNvSpPr>
+          <p:nvPr>
+            <p:ph type="title"/>
+          </p:nvPr>
+        </p:nvSpPr>
+        <p:spPr>
+          <a:xfrm>
+            <a:off x="457201" y="204787"/>
+            <a:ext cx="3008313" cy="871538"/>
+          </a:xfrm>
+        </p:spPr>
+        <p:txBody>
+          <a:bodyPr/>
+          <a:lstStyle/>
+          <a:p>
+            <a:pPr lvl="0" indent="0" marL="0">
+              <a:buNone/>
+            </a:pPr>
+            <a:r>
+              <a:rPr/>
+              <a:t>Patchwork</a:t>
+            </a:r>
+          </a:p>
+        </p:txBody>
+      </p:sp>
+      <p:sp>
+        <p:nvSpPr>
+          <p:cNvPr id="4" name="Text Placeholder 3"/>
+          <p:cNvSpPr>
+            <a:spLocks noGrp="1"/>
+          </p:cNvSpPr>
+          <p:nvPr>
+            <p:ph idx="2" sz="half" type="body"/>
+          </p:nvPr>
+        </p:nvSpPr>
+        <p:spPr/>
+        <p:txBody>
+          <a:bodyPr/>
+          <a:lstStyle/>
+          <a:p>
+            <a:pPr lvl="0" indent="0">
+              <a:buNone/>
+            </a:pPr>
+            <a:r>
+              <a:rPr>
+                <a:solidFill>
+                  <a:srgbClr val="003B4F"/>
+                </a:solidFill>
+                <a:latin typeface="Courier"/>
+              </a:rPr>
+              <a:t>il1a &lt;- covid </a:t>
+            </a:r>
+            <a:r>
+              <a:rPr>
+                <a:solidFill>
+                  <a:srgbClr val="5E5E5E"/>
+                </a:solidFill>
+                <a:latin typeface="Courier"/>
+              </a:rPr>
+              <a:t>|&gt;</a:t>
+            </a:r>
+            <a:br/>
+            <a:r>
+              <a:rPr>
+                <a:solidFill>
+                  <a:srgbClr val="003B4F"/>
+                </a:solidFill>
+                <a:latin typeface="Courier"/>
+              </a:rPr>
+              <a:t>  </a:t>
+            </a:r>
+            <a:r>
+              <a:rPr>
+                <a:solidFill>
+                  <a:srgbClr val="4758AB"/>
+                </a:solidFill>
+                <a:latin typeface="Courier"/>
+              </a:rPr>
+              <a:t>filter</a:t>
+            </a:r>
+            <a:r>
+              <a:rPr>
+                <a:solidFill>
+                  <a:srgbClr val="003B4F"/>
+                </a:solidFill>
+                <a:latin typeface="Courier"/>
+              </a:rPr>
+              <a:t>(status </a:t>
+            </a:r>
+            <a:r>
+              <a:rPr>
+                <a:solidFill>
+                  <a:srgbClr val="5E5E5E"/>
+                </a:solidFill>
+                <a:latin typeface="Courier"/>
+              </a:rPr>
+              <a:t>==</a:t>
+            </a:r>
+            <a:r>
+              <a:rPr>
+                <a:solidFill>
+                  <a:srgbClr val="003B4F"/>
+                </a:solidFill>
+                <a:latin typeface="Courier"/>
+              </a:rPr>
+              <a:t> </a:t>
+            </a:r>
+            <a:r>
+              <a:rPr>
+                <a:solidFill>
+                  <a:srgbClr val="20794D"/>
+                </a:solidFill>
+                <a:latin typeface="Courier"/>
+              </a:rPr>
+              <a:t>"nCOV"</a:t>
+            </a:r>
+            <a:r>
+              <a:rPr>
+                <a:solidFill>
+                  <a:srgbClr val="003B4F"/>
+                </a:solidFill>
+                <a:latin typeface="Courier"/>
+              </a:rPr>
+              <a:t>) </a:t>
+            </a:r>
+            <a:r>
+              <a:rPr>
+                <a:solidFill>
+                  <a:srgbClr val="5E5E5E"/>
+                </a:solidFill>
+                <a:latin typeface="Courier"/>
+              </a:rPr>
+              <a:t>|&gt;</a:t>
+            </a:r>
+            <a:br/>
+            <a:r>
+              <a:rPr>
+                <a:solidFill>
+                  <a:srgbClr val="003B4F"/>
+                </a:solidFill>
+                <a:latin typeface="Courier"/>
+              </a:rPr>
+              <a:t>  </a:t>
+            </a:r>
+            <a:r>
+              <a:rPr>
+                <a:solidFill>
+                  <a:srgbClr val="4758AB"/>
+                </a:solidFill>
+                <a:latin typeface="Courier"/>
+              </a:rPr>
+              <a:t>ggplot</a:t>
+            </a:r>
+            <a:r>
+              <a:rPr>
+                <a:solidFill>
+                  <a:srgbClr val="003B4F"/>
+                </a:solidFill>
+                <a:latin typeface="Courier"/>
+              </a:rPr>
+              <a:t>(</a:t>
+            </a:r>
+            <a:r>
+              <a:rPr>
+                <a:solidFill>
+                  <a:srgbClr val="4758AB"/>
+                </a:solidFill>
+                <a:latin typeface="Courier"/>
+              </a:rPr>
+              <a:t>aes</a:t>
+            </a:r>
+            <a:r>
+              <a:rPr>
+                <a:solidFill>
+                  <a:srgbClr val="003B4F"/>
+                </a:solidFill>
+                <a:latin typeface="Courier"/>
+              </a:rPr>
+              <a:t>(</a:t>
+            </a:r>
+            <a:r>
+              <a:rPr>
+                <a:solidFill>
+                  <a:srgbClr val="657422"/>
+                </a:solidFill>
+                <a:latin typeface="Courier"/>
+              </a:rPr>
+              <a:t>x =</a:t>
+            </a:r>
+            <a:r>
+              <a:rPr>
+                <a:solidFill>
+                  <a:srgbClr val="003B4F"/>
+                </a:solidFill>
+                <a:latin typeface="Courier"/>
+              </a:rPr>
+              <a:t> time, </a:t>
+            </a:r>
+            <a:r>
+              <a:rPr>
+                <a:solidFill>
+                  <a:srgbClr val="657422"/>
+                </a:solidFill>
+                <a:latin typeface="Courier"/>
+              </a:rPr>
+              <a:t>y =</a:t>
+            </a:r>
+            <a:r>
+              <a:rPr>
+                <a:solidFill>
+                  <a:srgbClr val="003B4F"/>
+                </a:solidFill>
+                <a:latin typeface="Courier"/>
+              </a:rPr>
+              <a:t> IL1A, </a:t>
+            </a:r>
+            <a:r>
+              <a:rPr>
+                <a:solidFill>
+                  <a:srgbClr val="657422"/>
+                </a:solidFill>
+                <a:latin typeface="Courier"/>
+              </a:rPr>
+              <a:t>color =</a:t>
+            </a:r>
+            <a:r>
+              <a:rPr>
+                <a:solidFill>
+                  <a:srgbClr val="003B4F"/>
+                </a:solidFill>
+                <a:latin typeface="Courier"/>
+              </a:rPr>
+              <a:t> id)) </a:t>
+            </a:r>
+            <a:r>
+              <a:rPr>
+                <a:solidFill>
+                  <a:srgbClr val="5E5E5E"/>
+                </a:solidFill>
+                <a:latin typeface="Courier"/>
+              </a:rPr>
+              <a:t>+</a:t>
+            </a:r>
+            <a:r>
+              <a:rPr>
+                <a:solidFill>
+                  <a:srgbClr val="003B4F"/>
+                </a:solidFill>
+                <a:latin typeface="Courier"/>
+              </a:rPr>
+              <a:t> </a:t>
+            </a:r>
+            <a:br/>
+            <a:r>
+              <a:rPr>
+                <a:solidFill>
+                  <a:srgbClr val="003B4F"/>
+                </a:solidFill>
+                <a:latin typeface="Courier"/>
+              </a:rPr>
+              <a:t>  </a:t>
+            </a:r>
+            <a:r>
+              <a:rPr>
+                <a:solidFill>
+                  <a:srgbClr val="4758AB"/>
+                </a:solidFill>
+                <a:latin typeface="Courier"/>
+              </a:rPr>
+              <a:t>geom_point</a:t>
+            </a:r>
+            <a:r>
+              <a:rPr>
+                <a:solidFill>
+                  <a:srgbClr val="003B4F"/>
+                </a:solidFill>
+                <a:latin typeface="Courier"/>
+              </a:rPr>
+              <a:t>() </a:t>
+            </a:r>
+            <a:r>
+              <a:rPr>
+                <a:solidFill>
+                  <a:srgbClr val="5E5E5E"/>
+                </a:solidFill>
+                <a:latin typeface="Courier"/>
+              </a:rPr>
+              <a:t>+</a:t>
+            </a:r>
+            <a:r>
+              <a:rPr>
+                <a:solidFill>
+                  <a:srgbClr val="003B4F"/>
+                </a:solidFill>
+                <a:latin typeface="Courier"/>
+              </a:rPr>
+              <a:t> </a:t>
+            </a:r>
+            <a:br/>
+            <a:r>
+              <a:rPr>
+                <a:solidFill>
+                  <a:srgbClr val="003B4F"/>
+                </a:solidFill>
+                <a:latin typeface="Courier"/>
+              </a:rPr>
+              <a:t>  </a:t>
+            </a:r>
+            <a:r>
+              <a:rPr>
+                <a:solidFill>
+                  <a:srgbClr val="4758AB"/>
+                </a:solidFill>
+                <a:latin typeface="Courier"/>
+              </a:rPr>
+              <a:t>geom_line</a:t>
+            </a:r>
+            <a:r>
+              <a:rPr>
+                <a:solidFill>
+                  <a:srgbClr val="003B4F"/>
+                </a:solidFill>
+                <a:latin typeface="Courier"/>
+              </a:rPr>
+              <a:t>()</a:t>
+            </a:r>
+            <a:br/>
+            <a:br/>
+            <a:r>
+              <a:rPr>
+                <a:solidFill>
+                  <a:srgbClr val="003B4F"/>
+                </a:solidFill>
+                <a:latin typeface="Courier"/>
+              </a:rPr>
+              <a:t>il1b &lt;- covid </a:t>
+            </a:r>
+            <a:r>
+              <a:rPr>
+                <a:solidFill>
+                  <a:srgbClr val="5E5E5E"/>
+                </a:solidFill>
+                <a:latin typeface="Courier"/>
+              </a:rPr>
+              <a:t>|&gt;</a:t>
+            </a:r>
+            <a:br/>
+            <a:r>
+              <a:rPr>
+                <a:solidFill>
+                  <a:srgbClr val="003B4F"/>
+                </a:solidFill>
+                <a:latin typeface="Courier"/>
+              </a:rPr>
+              <a:t>  </a:t>
+            </a:r>
+            <a:r>
+              <a:rPr>
+                <a:solidFill>
+                  <a:srgbClr val="4758AB"/>
+                </a:solidFill>
+                <a:latin typeface="Courier"/>
+              </a:rPr>
+              <a:t>filter</a:t>
+            </a:r>
+            <a:r>
+              <a:rPr>
+                <a:solidFill>
+                  <a:srgbClr val="003B4F"/>
+                </a:solidFill>
+                <a:latin typeface="Courier"/>
+              </a:rPr>
+              <a:t>(status </a:t>
+            </a:r>
+            <a:r>
+              <a:rPr>
+                <a:solidFill>
+                  <a:srgbClr val="5E5E5E"/>
+                </a:solidFill>
+                <a:latin typeface="Courier"/>
+              </a:rPr>
+              <a:t>==</a:t>
+            </a:r>
+            <a:r>
+              <a:rPr>
+                <a:solidFill>
+                  <a:srgbClr val="003B4F"/>
+                </a:solidFill>
+                <a:latin typeface="Courier"/>
+              </a:rPr>
+              <a:t> </a:t>
+            </a:r>
+            <a:r>
+              <a:rPr>
+                <a:solidFill>
+                  <a:srgbClr val="20794D"/>
+                </a:solidFill>
+                <a:latin typeface="Courier"/>
+              </a:rPr>
+              <a:t>"nCOV"</a:t>
+            </a:r>
+            <a:r>
+              <a:rPr>
+                <a:solidFill>
+                  <a:srgbClr val="003B4F"/>
+                </a:solidFill>
+                <a:latin typeface="Courier"/>
+              </a:rPr>
+              <a:t>) </a:t>
+            </a:r>
+            <a:r>
+              <a:rPr>
+                <a:solidFill>
+                  <a:srgbClr val="5E5E5E"/>
+                </a:solidFill>
+                <a:latin typeface="Courier"/>
+              </a:rPr>
+              <a:t>|&gt;</a:t>
+            </a:r>
+            <a:br/>
+            <a:r>
+              <a:rPr>
+                <a:solidFill>
+                  <a:srgbClr val="003B4F"/>
+                </a:solidFill>
+                <a:latin typeface="Courier"/>
+              </a:rPr>
+              <a:t>  </a:t>
+            </a:r>
+            <a:r>
+              <a:rPr>
+                <a:solidFill>
+                  <a:srgbClr val="4758AB"/>
+                </a:solidFill>
+                <a:latin typeface="Courier"/>
+              </a:rPr>
+              <a:t>ggplot</a:t>
+            </a:r>
+            <a:r>
+              <a:rPr>
+                <a:solidFill>
+                  <a:srgbClr val="003B4F"/>
+                </a:solidFill>
+                <a:latin typeface="Courier"/>
+              </a:rPr>
+              <a:t>(</a:t>
+            </a:r>
+            <a:r>
+              <a:rPr>
+                <a:solidFill>
+                  <a:srgbClr val="4758AB"/>
+                </a:solidFill>
+                <a:latin typeface="Courier"/>
+              </a:rPr>
+              <a:t>aes</a:t>
+            </a:r>
+            <a:r>
+              <a:rPr>
+                <a:solidFill>
+                  <a:srgbClr val="003B4F"/>
+                </a:solidFill>
+                <a:latin typeface="Courier"/>
+              </a:rPr>
+              <a:t>(</a:t>
+            </a:r>
+            <a:r>
+              <a:rPr>
+                <a:solidFill>
+                  <a:srgbClr val="657422"/>
+                </a:solidFill>
+                <a:latin typeface="Courier"/>
+              </a:rPr>
+              <a:t>x =</a:t>
+            </a:r>
+            <a:r>
+              <a:rPr>
+                <a:solidFill>
+                  <a:srgbClr val="003B4F"/>
+                </a:solidFill>
+                <a:latin typeface="Courier"/>
+              </a:rPr>
+              <a:t> time, </a:t>
+            </a:r>
+            <a:r>
+              <a:rPr>
+                <a:solidFill>
+                  <a:srgbClr val="657422"/>
+                </a:solidFill>
+                <a:latin typeface="Courier"/>
+              </a:rPr>
+              <a:t>y =</a:t>
+            </a:r>
+            <a:r>
+              <a:rPr>
+                <a:solidFill>
+                  <a:srgbClr val="003B4F"/>
+                </a:solidFill>
+                <a:latin typeface="Courier"/>
+              </a:rPr>
+              <a:t> IL1B, </a:t>
+            </a:r>
+            <a:r>
+              <a:rPr>
+                <a:solidFill>
+                  <a:srgbClr val="657422"/>
+                </a:solidFill>
+                <a:latin typeface="Courier"/>
+              </a:rPr>
+              <a:t>color =</a:t>
+            </a:r>
+            <a:r>
+              <a:rPr>
+                <a:solidFill>
+                  <a:srgbClr val="003B4F"/>
+                </a:solidFill>
+                <a:latin typeface="Courier"/>
+              </a:rPr>
+              <a:t> id)) </a:t>
+            </a:r>
+            <a:r>
+              <a:rPr>
+                <a:solidFill>
+                  <a:srgbClr val="5E5E5E"/>
+                </a:solidFill>
+                <a:latin typeface="Courier"/>
+              </a:rPr>
+              <a:t>+</a:t>
+            </a:r>
+            <a:r>
+              <a:rPr>
+                <a:solidFill>
+                  <a:srgbClr val="003B4F"/>
+                </a:solidFill>
+                <a:latin typeface="Courier"/>
+              </a:rPr>
+              <a:t> </a:t>
+            </a:r>
+            <a:br/>
+            <a:r>
+              <a:rPr>
+                <a:solidFill>
+                  <a:srgbClr val="003B4F"/>
+                </a:solidFill>
+                <a:latin typeface="Courier"/>
+              </a:rPr>
+              <a:t>  </a:t>
+            </a:r>
+            <a:r>
+              <a:rPr>
+                <a:solidFill>
+                  <a:srgbClr val="4758AB"/>
+                </a:solidFill>
+                <a:latin typeface="Courier"/>
+              </a:rPr>
+              <a:t>geom_point</a:t>
+            </a:r>
+            <a:r>
+              <a:rPr>
+                <a:solidFill>
+                  <a:srgbClr val="003B4F"/>
+                </a:solidFill>
+                <a:latin typeface="Courier"/>
+              </a:rPr>
+              <a:t>() </a:t>
+            </a:r>
+            <a:r>
+              <a:rPr>
+                <a:solidFill>
+                  <a:srgbClr val="5E5E5E"/>
+                </a:solidFill>
+                <a:latin typeface="Courier"/>
+              </a:rPr>
+              <a:t>+</a:t>
+            </a:r>
+            <a:r>
+              <a:rPr>
+                <a:solidFill>
+                  <a:srgbClr val="003B4F"/>
+                </a:solidFill>
+                <a:latin typeface="Courier"/>
+              </a:rPr>
+              <a:t> </a:t>
+            </a:r>
+            <a:br/>
+            <a:r>
+              <a:rPr>
+                <a:solidFill>
+                  <a:srgbClr val="003B4F"/>
+                </a:solidFill>
+                <a:latin typeface="Courier"/>
+              </a:rPr>
+              <a:t>  </a:t>
+            </a:r>
+            <a:r>
+              <a:rPr>
+                <a:solidFill>
+                  <a:srgbClr val="4758AB"/>
+                </a:solidFill>
+                <a:latin typeface="Courier"/>
+              </a:rPr>
+              <a:t>geom_line</a:t>
+            </a:r>
+            <a:r>
+              <a:rPr>
+                <a:solidFill>
+                  <a:srgbClr val="003B4F"/>
+                </a:solidFill>
+                <a:latin typeface="Courier"/>
+              </a:rPr>
+              <a:t>()</a:t>
+            </a:r>
+            <a:br/>
+            <a:br/>
+            <a:r>
+              <a:rPr>
+                <a:solidFill>
+                  <a:srgbClr val="003B4F"/>
+                </a:solidFill>
+                <a:latin typeface="Courier"/>
+              </a:rPr>
+              <a:t>(il1a </a:t>
+            </a:r>
+            <a:r>
+              <a:rPr>
+                <a:solidFill>
+                  <a:srgbClr val="5E5E5E"/>
+                </a:solidFill>
+                <a:latin typeface="Courier"/>
+              </a:rPr>
+              <a:t>|</a:t>
+            </a:r>
+            <a:r>
+              <a:rPr>
+                <a:solidFill>
+                  <a:srgbClr val="003B4F"/>
+                </a:solidFill>
+                <a:latin typeface="Courier"/>
+              </a:rPr>
+              <a:t> il1b ) </a:t>
+            </a:r>
+            <a:r>
+              <a:rPr>
+                <a:solidFill>
+                  <a:srgbClr val="5E5E5E"/>
+                </a:solidFill>
+                <a:latin typeface="Courier"/>
+              </a:rPr>
+              <a:t>+</a:t>
+            </a:r>
+            <a:br/>
+            <a:r>
+              <a:rPr>
+                <a:solidFill>
+                  <a:srgbClr val="003B4F"/>
+                </a:solidFill>
+                <a:latin typeface="Courier"/>
+              </a:rPr>
+              <a:t>  </a:t>
+            </a:r>
+            <a:r>
+              <a:rPr>
+                <a:solidFill>
+                  <a:srgbClr val="4758AB"/>
+                </a:solidFill>
+                <a:latin typeface="Courier"/>
+              </a:rPr>
+              <a:t>plot_layout</a:t>
+            </a:r>
+            <a:r>
+              <a:rPr>
+                <a:solidFill>
+                  <a:srgbClr val="003B4F"/>
+                </a:solidFill>
+                <a:latin typeface="Courier"/>
+              </a:rPr>
+              <a:t>(</a:t>
+            </a:r>
+            <a:r>
+              <a:rPr>
+                <a:solidFill>
+                  <a:srgbClr val="657422"/>
+                </a:solidFill>
+                <a:latin typeface="Courier"/>
+              </a:rPr>
+              <a:t>guides =</a:t>
+            </a:r>
+            <a:r>
+              <a:rPr>
+                <a:solidFill>
+                  <a:srgbClr val="003B4F"/>
+                </a:solidFill>
+                <a:latin typeface="Courier"/>
+              </a:rPr>
+              <a:t> </a:t>
+            </a:r>
+            <a:r>
+              <a:rPr>
+                <a:solidFill>
+                  <a:srgbClr val="20794D"/>
+                </a:solidFill>
+                <a:latin typeface="Courier"/>
+              </a:rPr>
+              <a:t>"collect"</a:t>
+            </a:r>
+            <a:r>
+              <a:rPr>
+                <a:solidFill>
+                  <a:srgbClr val="003B4F"/>
+                </a:solidFill>
+                <a:latin typeface="Courier"/>
+              </a:rPr>
+              <a:t>) </a:t>
+            </a:r>
+            <a:r>
+              <a:rPr>
+                <a:solidFill>
+                  <a:srgbClr val="5E5E5E"/>
+                </a:solidFill>
+                <a:latin typeface="Courier"/>
+              </a:rPr>
+              <a:t>&amp;</a:t>
+            </a:r>
+            <a:r>
+              <a:rPr>
+                <a:solidFill>
+                  <a:srgbClr val="003B4F"/>
+                </a:solidFill>
+                <a:latin typeface="Courier"/>
+              </a:rPr>
+              <a:t> </a:t>
+            </a:r>
+            <a:br/>
+            <a:r>
+              <a:rPr>
+                <a:solidFill>
+                  <a:srgbClr val="003B4F"/>
+                </a:solidFill>
+                <a:latin typeface="Courier"/>
+              </a:rPr>
+              <a:t>  </a:t>
+            </a:r>
+            <a:r>
+              <a:rPr>
+                <a:solidFill>
+                  <a:srgbClr val="4758AB"/>
+                </a:solidFill>
+                <a:latin typeface="Courier"/>
+              </a:rPr>
+              <a:t>theme</a:t>
+            </a:r>
+            <a:r>
+              <a:rPr>
+                <a:solidFill>
+                  <a:srgbClr val="003B4F"/>
+                </a:solidFill>
+                <a:latin typeface="Courier"/>
+              </a:rPr>
+              <a:t>(</a:t>
+            </a:r>
+            <a:r>
+              <a:rPr>
+                <a:solidFill>
+                  <a:srgbClr val="657422"/>
+                </a:solidFill>
+                <a:latin typeface="Courier"/>
+              </a:rPr>
+              <a:t>legend.position =</a:t>
+            </a:r>
+            <a:r>
+              <a:rPr>
+                <a:solidFill>
+                  <a:srgbClr val="003B4F"/>
+                </a:solidFill>
+                <a:latin typeface="Courier"/>
+              </a:rPr>
+              <a:t> </a:t>
+            </a:r>
+            <a:r>
+              <a:rPr>
+                <a:solidFill>
+                  <a:srgbClr val="20794D"/>
+                </a:solidFill>
+                <a:latin typeface="Courier"/>
+              </a:rPr>
+              <a:t>"bottom"</a:t>
+            </a:r>
+            <a:r>
+              <a:rPr>
+                <a:solidFill>
+                  <a:srgbClr val="003B4F"/>
+                </a:solidFill>
+                <a:latin typeface="Courier"/>
+              </a:rPr>
+              <a:t>)</a:t>
+            </a:r>
+          </a:p>
+        </p:txBody>
+      </p:sp>
+      <p:pic>
+        <p:nvPicPr>
+          <p:cNvPr descr="99_slides_with_code_files/figure-pptx/pathchwork%20of%20plots-1.png" id="0" name="Picture 1"/>
+          <p:cNvPicPr>
+            <a:picLocks noGrp="1" noChangeAspect="1"/>
+          </p:cNvPicPr>
+          <p:nvPr/>
+        </p:nvPicPr>
+        <p:blipFill>
+          <a:blip r:embed="rId2"/>
+          <a:stretch>
+            <a:fillRect/>
+          </a:stretch>
+        </p:blipFill>
+        <p:spPr bwMode="auto">
+          <a:xfrm>
+            <a:off x="3568700" y="1117600"/>
+            <a:ext cx="5105400" cy="2552700"/>
+          </a:xfrm>
+          <a:prstGeom prst="rect">
+            <a:avLst/>
+          </a:prstGeom>
+          <a:noFill/>
+          <a:ln w="9525">
+            <a:noFill/>
+            <a:headEnd/>
+            <a:tailEnd/>
+          </a:ln>
+        </p:spPr>
+      </p:pic>
     </p:spTree>
   </p:cSld>
 </p:sld>
@@ -4773,7 +5631,7 @@
             </a:pPr>
             <a:r>
               <a:rPr/>
-              <a:t>Pheatmap example</a:t>
+              <a:t>Pheatmap demo</a:t>
             </a:r>
           </a:p>
         </p:txBody>
@@ -4822,7 +5680,7 @@
                 </a:solidFill>
                 <a:latin typeface="Courier"/>
               </a:rPr>
-              <a:t>minicovid &lt;- </a:t>
+              <a:t>M &lt;- </a:t>
             </a:r>
             <a:r>
               <a:rPr>
@@ -4831,16 +5689,16 @@
                 </a:solidFill>
                 <a:latin typeface="Courier"/>
               </a:rPr>
-              <a:t>as.data.frame</a:t>
-            </a:r>
-            <a:r>
-              <a:rPr>
-                <a:solidFill>
-                  <a:srgbClr val="003B4F"/>
-                </a:solidFill>
-                <a:latin typeface="Courier"/>
-              </a:rPr>
-              <a:t>(covid[, </a:t>
+              <a:t>matrix</a:t>
+            </a:r>
+            <a:r>
+              <a:rPr>
+                <a:solidFill>
+                  <a:srgbClr val="003B4F"/>
+                </a:solidFill>
+                <a:latin typeface="Courier"/>
+              </a:rPr>
+              <a:t>(</a:t>
             </a:r>
             <a:r>
               <a:rPr>
@@ -4849,7 +5707,7 @@
                 </a:solidFill>
                 <a:latin typeface="Courier"/>
               </a:rPr>
-              <a:t>c</a:t>
+              <a:t>rnorm</a:t>
             </a:r>
             <a:r>
               <a:rPr>
@@ -4863,11 +5721,29 @@
             <a:r>
               <a:rPr>
                 <a:solidFill>
-                  <a:srgbClr val="20794D"/>
-                </a:solidFill>
-                <a:latin typeface="Courier"/>
-              </a:rPr>
-              <a:t>"IL1A"</a:t>
+                  <a:srgbClr val="AD0000"/>
+                </a:solidFill>
+                <a:latin typeface="Courier"/>
+              </a:rPr>
+              <a:t>35</a:t>
+            </a:r>
+            <a:r>
+              <a:rPr>
+                <a:solidFill>
+                  <a:srgbClr val="003B4F"/>
+                </a:solidFill>
+                <a:latin typeface="Courier"/>
+              </a:rPr>
+              <a:t>), </a:t>
+            </a:r>
+            <a:r>
+              <a:rPr>
+                <a:solidFill>
+                  <a:srgbClr val="AD0000"/>
+                </a:solidFill>
+                <a:latin typeface="Courier"/>
+              </a:rPr>
+              <a:t>5</a:t>
             </a:r>
             <a:r>
               <a:rPr>
@@ -4881,92 +5757,20 @@
             <a:r>
               <a:rPr>
                 <a:solidFill>
-                  <a:srgbClr val="20794D"/>
-                </a:solidFill>
-                <a:latin typeface="Courier"/>
-              </a:rPr>
-              <a:t>"IL1B"</a:t>
-            </a:r>
-            <a:r>
-              <a:rPr>
-                <a:solidFill>
-                  <a:srgbClr val="003B4F"/>
-                </a:solidFill>
-                <a:latin typeface="Courier"/>
-              </a:rPr>
-              <a:t>, </a:t>
-            </a:r>
-            <a:r>
-              <a:rPr>
-                <a:solidFill>
-                  <a:srgbClr val="20794D"/>
-                </a:solidFill>
-                <a:latin typeface="Courier"/>
-              </a:rPr>
-              <a:t>"IL1R1"</a:t>
-            </a:r>
-            <a:r>
-              <a:rPr>
-                <a:solidFill>
-                  <a:srgbClr val="003B4F"/>
-                </a:solidFill>
-                <a:latin typeface="Courier"/>
-              </a:rPr>
-              <a:t>, </a:t>
-            </a:r>
-            <a:r>
-              <a:rPr>
-                <a:solidFill>
-                  <a:srgbClr val="20794D"/>
-                </a:solidFill>
-                <a:latin typeface="Courier"/>
-              </a:rPr>
-              <a:t>"CD4"</a:t>
-            </a:r>
-            <a:r>
-              <a:rPr>
-                <a:solidFill>
-                  <a:srgbClr val="003B4F"/>
-                </a:solidFill>
-                <a:latin typeface="Courier"/>
-              </a:rPr>
-              <a:t>, </a:t>
-            </a:r>
-            <a:r>
-              <a:rPr>
-                <a:solidFill>
-                  <a:srgbClr val="20794D"/>
-                </a:solidFill>
-                <a:latin typeface="Courier"/>
-              </a:rPr>
-              <a:t>"CD8A"</a:t>
-            </a:r>
-            <a:r>
-              <a:rPr>
-                <a:solidFill>
-                  <a:srgbClr val="003B4F"/>
-                </a:solidFill>
-                <a:latin typeface="Courier"/>
-              </a:rPr>
-              <a:t>, </a:t>
-            </a:r>
-            <a:r>
-              <a:rPr>
-                <a:solidFill>
-                  <a:srgbClr val="20794D"/>
-                </a:solidFill>
-                <a:latin typeface="Courier"/>
-              </a:rPr>
-              <a:t>"CD8B"</a:t>
-            </a:r>
-            <a:r>
-              <a:rPr>
-                <a:solidFill>
-                  <a:srgbClr val="003B4F"/>
-                </a:solidFill>
-                <a:latin typeface="Courier"/>
-              </a:rPr>
-              <a:t>)])</a:t>
+                  <a:srgbClr val="AD0000"/>
+                </a:solidFill>
+                <a:latin typeface="Courier"/>
+              </a:rPr>
+              <a:t>7</a:t>
+            </a:r>
+            <a:r>
+              <a:rPr>
+                <a:solidFill>
+                  <a:srgbClr val="003B4F"/>
+                </a:solidFill>
+                <a:latin typeface="Courier"/>
+              </a:rPr>
+              <a:t>)</a:t>
             </a:r>
             <a:br/>
             <a:r>
@@ -4976,16 +5780,16 @@
                 </a:solidFill>
                 <a:latin typeface="Courier"/>
               </a:rPr>
-              <a:t>rownames</a:t>
-            </a:r>
-            <a:r>
-              <a:rPr>
-                <a:solidFill>
-                  <a:srgbClr val="003B4F"/>
-                </a:solidFill>
-                <a:latin typeface="Courier"/>
-              </a:rPr>
-              <a:t>(minicovid) &lt;- </a:t>
+              <a:t>dimnames</a:t>
+            </a:r>
+            <a:r>
+              <a:rPr>
+                <a:solidFill>
+                  <a:srgbClr val="003B4F"/>
+                </a:solidFill>
+                <a:latin typeface="Courier"/>
+              </a:rPr>
+              <a:t>(M) &lt;- </a:t>
             </a:r>
             <a:r>
               <a:rPr>
@@ -4994,16 +5798,25 @@
                 </a:solidFill>
                 <a:latin typeface="Courier"/>
               </a:rPr>
-              <a:t>paste0</a:t>
-            </a:r>
-            <a:r>
-              <a:rPr>
-                <a:solidFill>
-                  <a:srgbClr val="003B4F"/>
-                </a:solidFill>
-                <a:latin typeface="Courier"/>
-              </a:rPr>
-              <a:t>(covid</a:t>
+              <a:t>list</a:t>
+            </a:r>
+            <a:r>
+              <a:rPr>
+                <a:solidFill>
+                  <a:srgbClr val="003B4F"/>
+                </a:solidFill>
+                <a:latin typeface="Courier"/>
+              </a:rPr>
+              <a:t>(letters[</a:t>
+            </a:r>
+            <a:r>
+              <a:rPr>
+                <a:solidFill>
+                  <a:srgbClr val="AD0000"/>
+                </a:solidFill>
+                <a:latin typeface="Courier"/>
+              </a:rPr>
+              <a:t>1</a:t>
             </a:r>
             <a:r>
               <a:rPr>
@@ -5012,34 +5825,34 @@
                 </a:solidFill>
                 <a:latin typeface="Courier"/>
               </a:rPr>
-              <a:t>$</a:t>
-            </a:r>
-            <a:r>
-              <a:rPr>
-                <a:solidFill>
-                  <a:srgbClr val="003B4F"/>
-                </a:solidFill>
-                <a:latin typeface="Courier"/>
-              </a:rPr>
-              <a:t>id, </a:t>
-            </a:r>
-            <a:r>
-              <a:rPr>
-                <a:solidFill>
-                  <a:srgbClr val="20794D"/>
-                </a:solidFill>
-                <a:latin typeface="Courier"/>
-              </a:rPr>
-              <a:t>" t="</a:t>
-            </a:r>
-            <a:r>
-              <a:rPr>
-                <a:solidFill>
-                  <a:srgbClr val="003B4F"/>
-                </a:solidFill>
-                <a:latin typeface="Courier"/>
-              </a:rPr>
-              <a:t>, covid</a:t>
+              <a:t>:</a:t>
+            </a:r>
+            <a:r>
+              <a:rPr>
+                <a:solidFill>
+                  <a:srgbClr val="AD0000"/>
+                </a:solidFill>
+                <a:latin typeface="Courier"/>
+              </a:rPr>
+              <a:t>5</a:t>
+            </a:r>
+            <a:r>
+              <a:rPr>
+                <a:solidFill>
+                  <a:srgbClr val="003B4F"/>
+                </a:solidFill>
+                <a:latin typeface="Courier"/>
+              </a:rPr>
+              <a:t>], LETTERS[</a:t>
+            </a:r>
+            <a:r>
+              <a:rPr>
+                <a:solidFill>
+                  <a:srgbClr val="AD0000"/>
+                </a:solidFill>
+                <a:latin typeface="Courier"/>
+              </a:rPr>
+              <a:t>1</a:t>
             </a:r>
             <a:r>
               <a:rPr>
@@ -5048,16 +5861,25 @@
                 </a:solidFill>
                 <a:latin typeface="Courier"/>
               </a:rPr>
-              <a:t>$</a:t>
-            </a:r>
-            <a:r>
-              <a:rPr>
-                <a:solidFill>
-                  <a:srgbClr val="003B4F"/>
-                </a:solidFill>
-                <a:latin typeface="Courier"/>
-              </a:rPr>
-              <a:t>time)</a:t>
+              <a:t>:</a:t>
+            </a:r>
+            <a:r>
+              <a:rPr>
+                <a:solidFill>
+                  <a:srgbClr val="AD0000"/>
+                </a:solidFill>
+                <a:latin typeface="Courier"/>
+              </a:rPr>
+              <a:t>7</a:t>
+            </a:r>
+            <a:r>
+              <a:rPr>
+                <a:solidFill>
+                  <a:srgbClr val="003B4F"/>
+                </a:solidFill>
+                <a:latin typeface="Courier"/>
+              </a:rPr>
+              <a:t>])</a:t>
             </a:r>
             <a:br/>
             <a:r>
@@ -5076,7 +5898,7 @@
                 </a:solidFill>
                 <a:latin typeface="Courier"/>
               </a:rPr>
-              <a:t>(minicovid, </a:t>
+              <a:t>(</a:t>
             </a:r>
             <a:r>
               <a:rPr>
@@ -5085,167 +5907,23 @@
                 </a:solidFill>
                 <a:latin typeface="Courier"/>
               </a:rPr>
-              <a:t>clustering_method =</a:t>
-            </a:r>
-            <a:r>
-              <a:rPr>
-                <a:solidFill>
-                  <a:srgbClr val="003B4F"/>
-                </a:solidFill>
-                <a:latin typeface="Courier"/>
-              </a:rPr>
-              <a:t> </a:t>
-            </a:r>
-            <a:r>
-              <a:rPr>
-                <a:solidFill>
-                  <a:srgbClr val="20794D"/>
-                </a:solidFill>
-                <a:latin typeface="Courier"/>
-              </a:rPr>
-              <a:t>"ward.D2"</a:t>
-            </a:r>
-            <a:r>
-              <a:rPr>
-                <a:solidFill>
-                  <a:srgbClr val="003B4F"/>
-                </a:solidFill>
-                <a:latin typeface="Courier"/>
-              </a:rPr>
-              <a:t>, </a:t>
-            </a:r>
-            <a:r>
-              <a:rPr>
-                <a:solidFill>
-                  <a:srgbClr val="657422"/>
-                </a:solidFill>
-                <a:latin typeface="Courier"/>
-              </a:rPr>
-              <a:t>clustering_distance_cols =</a:t>
-            </a:r>
-            <a:r>
-              <a:rPr>
-                <a:solidFill>
-                  <a:srgbClr val="003B4F"/>
-                </a:solidFill>
-                <a:latin typeface="Courier"/>
-              </a:rPr>
-              <a:t> </a:t>
-            </a:r>
-            <a:r>
-              <a:rPr>
-                <a:solidFill>
-                  <a:srgbClr val="4758AB"/>
-                </a:solidFill>
-                <a:latin typeface="Courier"/>
-              </a:rPr>
-              <a:t>as.dist</a:t>
-            </a:r>
-            <a:r>
-              <a:rPr>
-                <a:solidFill>
-                  <a:srgbClr val="003B4F"/>
-                </a:solidFill>
-                <a:latin typeface="Courier"/>
-              </a:rPr>
-              <a:t>(</a:t>
-            </a:r>
-            <a:r>
-              <a:rPr>
-                <a:solidFill>
-                  <a:srgbClr val="AD0000"/>
-                </a:solidFill>
-                <a:latin typeface="Courier"/>
-              </a:rPr>
-              <a:t>1</a:t>
-            </a:r>
-            <a:r>
-              <a:rPr>
-                <a:solidFill>
-                  <a:srgbClr val="003B4F"/>
-                </a:solidFill>
-                <a:latin typeface="Courier"/>
-              </a:rPr>
-              <a:t> </a:t>
-            </a:r>
-            <a:r>
-              <a:rPr>
-                <a:solidFill>
-                  <a:srgbClr val="5E5E5E"/>
-                </a:solidFill>
-                <a:latin typeface="Courier"/>
-              </a:rPr>
-              <a:t>-</a:t>
-            </a:r>
-            <a:r>
-              <a:rPr>
-                <a:solidFill>
-                  <a:srgbClr val="003B4F"/>
-                </a:solidFill>
-                <a:latin typeface="Courier"/>
-              </a:rPr>
-              <a:t> </a:t>
-            </a:r>
-            <a:r>
-              <a:rPr>
-                <a:solidFill>
-                  <a:srgbClr val="4758AB"/>
-                </a:solidFill>
-                <a:latin typeface="Courier"/>
-              </a:rPr>
-              <a:t>cor</a:t>
-            </a:r>
-            <a:r>
-              <a:rPr>
-                <a:solidFill>
-                  <a:srgbClr val="003B4F"/>
-                </a:solidFill>
-                <a:latin typeface="Courier"/>
-              </a:rPr>
-              <a:t>(minicovid)), </a:t>
-            </a:r>
-            <a:r>
-              <a:rPr>
-                <a:solidFill>
-                  <a:srgbClr val="657422"/>
-                </a:solidFill>
-                <a:latin typeface="Courier"/>
-              </a:rPr>
-              <a:t>cellwidth =</a:t>
-            </a:r>
-            <a:r>
-              <a:rPr>
-                <a:solidFill>
-                  <a:srgbClr val="003B4F"/>
-                </a:solidFill>
-                <a:latin typeface="Courier"/>
-              </a:rPr>
-              <a:t> </a:t>
-            </a:r>
-            <a:r>
-              <a:rPr>
-                <a:solidFill>
-                  <a:srgbClr val="AD0000"/>
-                </a:solidFill>
-                <a:latin typeface="Courier"/>
-              </a:rPr>
-              <a:t>15</a:t>
-            </a:r>
-            <a:r>
-              <a:rPr>
-                <a:solidFill>
-                  <a:srgbClr val="003B4F"/>
-                </a:solidFill>
-                <a:latin typeface="Courier"/>
-              </a:rPr>
-              <a:t>)</a:t>
+              <a:t>mat =</a:t>
+            </a:r>
+            <a:r>
+              <a:rPr>
+                <a:solidFill>
+                  <a:srgbClr val="003B4F"/>
+                </a:solidFill>
+                <a:latin typeface="Courier"/>
+              </a:rPr>
+              <a:t> M)</a:t>
             </a:r>
           </a:p>
         </p:txBody>
       </p:sp>
       <p:pic>
         <p:nvPicPr>
-          <p:cNvPr descr="99_slides_with_code_files/figure-pptx/pheatmap%20minicovid-1.png" id="0" name="Picture 1"/>
+          <p:cNvPr descr="99_slides_with_code_files/figure-pptx/pheatmap%20demo-1.png" id="0" name="Picture 1"/>
           <p:cNvPicPr>
             <a:picLocks noGrp="1" noChangeAspect="1"/>
           </p:cNvPicPr>
@@ -5305,7 +5983,12 @@
             <p:ph type="title"/>
           </p:nvPr>
         </p:nvSpPr>
-        <p:spPr/>
+        <p:spPr>
+          <a:xfrm>
+            <a:off x="457201" y="204787"/>
+            <a:ext cx="3008313" cy="871538"/>
+          </a:xfrm>
+        </p:spPr>
         <p:txBody>
           <a:bodyPr/>
           <a:lstStyle/>
@@ -5315,19 +5998,19 @@
             </a:pPr>
             <a:r>
               <a:rPr/>
-              <a:t>Simple dplyr</a:t>
+              <a:t>Pheatmap example</a:t>
             </a:r>
           </a:p>
         </p:txBody>
       </p:sp>
       <p:sp>
         <p:nvSpPr>
-          <p:cNvPr id="3" name="Content Placeholder 2"/>
+          <p:cNvPr id="4" name="Text Placeholder 3"/>
           <p:cNvSpPr>
             <a:spLocks noGrp="1"/>
           </p:cNvSpPr>
           <p:nvPr>
-            <p:ph idx="1"/>
+            <p:ph idx="2" sz="half" type="body"/>
           </p:nvPr>
         </p:nvSpPr>
         <p:spPr/>
@@ -5341,11 +6024,30 @@
             <a:r>
               <a:rPr>
                 <a:solidFill>
-                  <a:srgbClr val="003B4F"/>
-                </a:solidFill>
-                <a:latin typeface="Courier"/>
-              </a:rPr>
-              <a:t>covid </a:t>
+                  <a:srgbClr val="4758AB"/>
+                </a:solidFill>
+                <a:latin typeface="Courier"/>
+              </a:rPr>
+              <a:t>library</a:t>
+            </a:r>
+            <a:r>
+              <a:rPr>
+                <a:solidFill>
+                  <a:srgbClr val="003B4F"/>
+                </a:solidFill>
+                <a:latin typeface="Courier"/>
+              </a:rPr>
+              <a:t>(pheatmap)</a:t>
+            </a:r>
+            <a:br/>
+            <a:r>
+              <a:rPr>
+                <a:solidFill>
+                  <a:srgbClr val="003B4F"/>
+                </a:solidFill>
+                <a:latin typeface="Courier"/>
+              </a:rPr>
+              <a:t>select_cases &lt;- covid</a:t>
             </a:r>
             <a:r>
               <a:rPr>
@@ -5354,7 +6056,43 @@
                 </a:solidFill>
                 <a:latin typeface="Courier"/>
               </a:rPr>
-              <a:t>%&gt;%</a:t>
+              <a:t>$</a:t>
+            </a:r>
+            <a:r>
+              <a:rPr>
+                <a:solidFill>
+                  <a:srgbClr val="003B4F"/>
+                </a:solidFill>
+                <a:latin typeface="Courier"/>
+              </a:rPr>
+              <a:t>status </a:t>
+            </a:r>
+            <a:r>
+              <a:rPr>
+                <a:solidFill>
+                  <a:srgbClr val="5E5E5E"/>
+                </a:solidFill>
+                <a:latin typeface="Courier"/>
+              </a:rPr>
+              <a:t>==</a:t>
+            </a:r>
+            <a:r>
+              <a:rPr>
+                <a:solidFill>
+                  <a:srgbClr val="003B4F"/>
+                </a:solidFill>
+                <a:latin typeface="Courier"/>
+              </a:rPr>
+              <a:t> </a:t>
+            </a:r>
+            <a:r>
+              <a:rPr>
+                <a:solidFill>
+                  <a:srgbClr val="20794D"/>
+                </a:solidFill>
+                <a:latin typeface="Courier"/>
+              </a:rPr>
+              <a:t>"nCOV"</a:t>
             </a:r>
             <a:br/>
             <a:r>
@@ -5364,7 +6102,7 @@
                 </a:solidFill>
                 <a:latin typeface="Courier"/>
               </a:rPr>
-              <a:t>  </a:t>
+              <a:t>minicovid &lt;- </a:t>
             </a:r>
             <a:r>
               <a:rPr>
@@ -5373,16 +6111,324 @@
                 </a:solidFill>
                 <a:latin typeface="Courier"/>
               </a:rPr>
-              <a:t>filter</a:t>
-            </a:r>
-            <a:r>
-              <a:rPr>
-                <a:solidFill>
-                  <a:srgbClr val="003B4F"/>
-                </a:solidFill>
-                <a:latin typeface="Courier"/>
-              </a:rPr>
-              <a:t>(status </a:t>
+              <a:t>as.data.frame</a:t>
+            </a:r>
+            <a:r>
+              <a:rPr>
+                <a:solidFill>
+                  <a:srgbClr val="003B4F"/>
+                </a:solidFill>
+                <a:latin typeface="Courier"/>
+              </a:rPr>
+              <a:t>(covid[select_cases, </a:t>
+            </a:r>
+            <a:r>
+              <a:rPr>
+                <a:solidFill>
+                  <a:srgbClr val="4758AB"/>
+                </a:solidFill>
+                <a:latin typeface="Courier"/>
+              </a:rPr>
+              <a:t>c</a:t>
+            </a:r>
+            <a:r>
+              <a:rPr>
+                <a:solidFill>
+                  <a:srgbClr val="003B4F"/>
+                </a:solidFill>
+                <a:latin typeface="Courier"/>
+              </a:rPr>
+              <a:t>(</a:t>
+            </a:r>
+            <a:r>
+              <a:rPr>
+                <a:solidFill>
+                  <a:srgbClr val="20794D"/>
+                </a:solidFill>
+                <a:latin typeface="Courier"/>
+              </a:rPr>
+              <a:t>"IL1A"</a:t>
+            </a:r>
+            <a:r>
+              <a:rPr>
+                <a:solidFill>
+                  <a:srgbClr val="003B4F"/>
+                </a:solidFill>
+                <a:latin typeface="Courier"/>
+              </a:rPr>
+              <a:t>, </a:t>
+            </a:r>
+            <a:r>
+              <a:rPr>
+                <a:solidFill>
+                  <a:srgbClr val="20794D"/>
+                </a:solidFill>
+                <a:latin typeface="Courier"/>
+              </a:rPr>
+              <a:t>"IL1B"</a:t>
+            </a:r>
+            <a:r>
+              <a:rPr>
+                <a:solidFill>
+                  <a:srgbClr val="003B4F"/>
+                </a:solidFill>
+                <a:latin typeface="Courier"/>
+              </a:rPr>
+              <a:t>, </a:t>
+            </a:r>
+            <a:r>
+              <a:rPr>
+                <a:solidFill>
+                  <a:srgbClr val="20794D"/>
+                </a:solidFill>
+                <a:latin typeface="Courier"/>
+              </a:rPr>
+              <a:t>"IL1R1"</a:t>
+            </a:r>
+            <a:r>
+              <a:rPr>
+                <a:solidFill>
+                  <a:srgbClr val="003B4F"/>
+                </a:solidFill>
+                <a:latin typeface="Courier"/>
+              </a:rPr>
+              <a:t>, </a:t>
+            </a:r>
+            <a:r>
+              <a:rPr>
+                <a:solidFill>
+                  <a:srgbClr val="20794D"/>
+                </a:solidFill>
+                <a:latin typeface="Courier"/>
+              </a:rPr>
+              <a:t>"CD4"</a:t>
+            </a:r>
+            <a:r>
+              <a:rPr>
+                <a:solidFill>
+                  <a:srgbClr val="003B4F"/>
+                </a:solidFill>
+                <a:latin typeface="Courier"/>
+              </a:rPr>
+              <a:t>, </a:t>
+            </a:r>
+            <a:r>
+              <a:rPr>
+                <a:solidFill>
+                  <a:srgbClr val="20794D"/>
+                </a:solidFill>
+                <a:latin typeface="Courier"/>
+              </a:rPr>
+              <a:t>"CD8A"</a:t>
+            </a:r>
+            <a:r>
+              <a:rPr>
+                <a:solidFill>
+                  <a:srgbClr val="003B4F"/>
+                </a:solidFill>
+                <a:latin typeface="Courier"/>
+              </a:rPr>
+              <a:t>, </a:t>
+            </a:r>
+            <a:r>
+              <a:rPr>
+                <a:solidFill>
+                  <a:srgbClr val="20794D"/>
+                </a:solidFill>
+                <a:latin typeface="Courier"/>
+              </a:rPr>
+              <a:t>"CD8B"</a:t>
+            </a:r>
+            <a:r>
+              <a:rPr>
+                <a:solidFill>
+                  <a:srgbClr val="003B4F"/>
+                </a:solidFill>
+                <a:latin typeface="Courier"/>
+              </a:rPr>
+              <a:t>)])</a:t>
+            </a:r>
+            <a:br/>
+            <a:r>
+              <a:rPr>
+                <a:solidFill>
+                  <a:srgbClr val="4758AB"/>
+                </a:solidFill>
+                <a:latin typeface="Courier"/>
+              </a:rPr>
+              <a:t>rownames</a:t>
+            </a:r>
+            <a:r>
+              <a:rPr>
+                <a:solidFill>
+                  <a:srgbClr val="003B4F"/>
+                </a:solidFill>
+                <a:latin typeface="Courier"/>
+              </a:rPr>
+              <a:t>(minicovid) &lt;- </a:t>
+            </a:r>
+            <a:r>
+              <a:rPr>
+                <a:solidFill>
+                  <a:srgbClr val="4758AB"/>
+                </a:solidFill>
+                <a:latin typeface="Courier"/>
+              </a:rPr>
+              <a:t>with</a:t>
+            </a:r>
+            <a:r>
+              <a:rPr>
+                <a:solidFill>
+                  <a:srgbClr val="003B4F"/>
+                </a:solidFill>
+                <a:latin typeface="Courier"/>
+              </a:rPr>
+              <a:t>(covid[select_cases,], </a:t>
+            </a:r>
+            <a:r>
+              <a:rPr>
+                <a:solidFill>
+                  <a:srgbClr val="4758AB"/>
+                </a:solidFill>
+                <a:latin typeface="Courier"/>
+              </a:rPr>
+              <a:t>paste0</a:t>
+            </a:r>
+            <a:r>
+              <a:rPr>
+                <a:solidFill>
+                  <a:srgbClr val="003B4F"/>
+                </a:solidFill>
+                <a:latin typeface="Courier"/>
+              </a:rPr>
+              <a:t>(id, </a:t>
+            </a:r>
+            <a:r>
+              <a:rPr>
+                <a:solidFill>
+                  <a:srgbClr val="20794D"/>
+                </a:solidFill>
+                <a:latin typeface="Courier"/>
+              </a:rPr>
+              <a:t>" t="</a:t>
+            </a:r>
+            <a:r>
+              <a:rPr>
+                <a:solidFill>
+                  <a:srgbClr val="003B4F"/>
+                </a:solidFill>
+                <a:latin typeface="Courier"/>
+              </a:rPr>
+              <a:t>, time))</a:t>
+            </a:r>
+            <a:br/>
+            <a:r>
+              <a:rPr>
+                <a:solidFill>
+                  <a:srgbClr val="4758AB"/>
+                </a:solidFill>
+                <a:latin typeface="Courier"/>
+              </a:rPr>
+              <a:t>pheatmap</a:t>
+            </a:r>
+            <a:r>
+              <a:rPr>
+                <a:solidFill>
+                  <a:srgbClr val="003B4F"/>
+                </a:solidFill>
+                <a:latin typeface="Courier"/>
+              </a:rPr>
+              <a:t>(minicovid, </a:t>
+            </a:r>
+            <a:r>
+              <a:rPr>
+                <a:solidFill>
+                  <a:srgbClr val="657422"/>
+                </a:solidFill>
+                <a:latin typeface="Courier"/>
+              </a:rPr>
+              <a:t>clustering_method =</a:t>
+            </a:r>
+            <a:r>
+              <a:rPr>
+                <a:solidFill>
+                  <a:srgbClr val="003B4F"/>
+                </a:solidFill>
+                <a:latin typeface="Courier"/>
+              </a:rPr>
+              <a:t> </a:t>
+            </a:r>
+            <a:r>
+              <a:rPr>
+                <a:solidFill>
+                  <a:srgbClr val="20794D"/>
+                </a:solidFill>
+                <a:latin typeface="Courier"/>
+              </a:rPr>
+              <a:t>"ward.D2"</a:t>
+            </a:r>
+            <a:r>
+              <a:rPr>
+                <a:solidFill>
+                  <a:srgbClr val="003B4F"/>
+                </a:solidFill>
+                <a:latin typeface="Courier"/>
+              </a:rPr>
+              <a:t>, </a:t>
+            </a:r>
+            <a:r>
+              <a:rPr>
+                <a:solidFill>
+                  <a:srgbClr val="657422"/>
+                </a:solidFill>
+                <a:latin typeface="Courier"/>
+              </a:rPr>
+              <a:t>clustering_distance_cols =</a:t>
+            </a:r>
+            <a:r>
+              <a:rPr>
+                <a:solidFill>
+                  <a:srgbClr val="003B4F"/>
+                </a:solidFill>
+                <a:latin typeface="Courier"/>
+              </a:rPr>
+              <a:t> </a:t>
+            </a:r>
+            <a:r>
+              <a:rPr>
+                <a:solidFill>
+                  <a:srgbClr val="4758AB"/>
+                </a:solidFill>
+                <a:latin typeface="Courier"/>
+              </a:rPr>
+              <a:t>as.dist</a:t>
+            </a:r>
+            <a:r>
+              <a:rPr>
+                <a:solidFill>
+                  <a:srgbClr val="003B4F"/>
+                </a:solidFill>
+                <a:latin typeface="Courier"/>
+              </a:rPr>
+              <a:t>(</a:t>
+            </a:r>
+            <a:r>
+              <a:rPr>
+                <a:solidFill>
+                  <a:srgbClr val="AD0000"/>
+                </a:solidFill>
+                <a:latin typeface="Courier"/>
+              </a:rPr>
+              <a:t>1</a:t>
+            </a:r>
+            <a:r>
+              <a:rPr>
+                <a:solidFill>
+                  <a:srgbClr val="003B4F"/>
+                </a:solidFill>
+                <a:latin typeface="Courier"/>
+              </a:rPr>
+              <a:t> </a:t>
             </a:r>
             <a:r>
               <a:rPr>
@@ -5391,7 +6437,7 @@
                 </a:solidFill>
                 <a:latin typeface="Courier"/>
               </a:rPr>
-              <a:t>==</a:t>
+              <a:t>-</a:t>
             </a:r>
             <a:r>
               <a:rPr>
@@ -5405,94 +6451,182 @@
             <a:r>
               <a:rPr>
                 <a:solidFill>
+                  <a:srgbClr val="4758AB"/>
+                </a:solidFill>
+                <a:latin typeface="Courier"/>
+              </a:rPr>
+              <a:t>cor</a:t>
+            </a:r>
+            <a:r>
+              <a:rPr>
+                <a:solidFill>
+                  <a:srgbClr val="003B4F"/>
+                </a:solidFill>
+                <a:latin typeface="Courier"/>
+              </a:rPr>
+              <a:t>(minicovid)), </a:t>
+            </a:r>
+            <a:r>
+              <a:rPr>
+                <a:solidFill>
+                  <a:srgbClr val="657422"/>
+                </a:solidFill>
+                <a:latin typeface="Courier"/>
+              </a:rPr>
+              <a:t>cellwidth =</a:t>
+            </a:r>
+            <a:r>
+              <a:rPr>
+                <a:solidFill>
+                  <a:srgbClr val="003B4F"/>
+                </a:solidFill>
+                <a:latin typeface="Courier"/>
+              </a:rPr>
+              <a:t> </a:t>
+            </a:r>
+            <a:r>
+              <a:rPr>
+                <a:solidFill>
+                  <a:srgbClr val="AD0000"/>
+                </a:solidFill>
+                <a:latin typeface="Courier"/>
+              </a:rPr>
+              <a:t>15</a:t>
+            </a:r>
+            <a:r>
+              <a:rPr>
+                <a:solidFill>
+                  <a:srgbClr val="003B4F"/>
+                </a:solidFill>
+                <a:latin typeface="Courier"/>
+              </a:rPr>
+              <a:t>, </a:t>
+            </a:r>
+            <a:r>
+              <a:rPr>
+                <a:solidFill>
+                  <a:srgbClr val="657422"/>
+                </a:solidFill>
+                <a:latin typeface="Courier"/>
+              </a:rPr>
+              <a:t>color =</a:t>
+            </a:r>
+            <a:r>
+              <a:rPr>
+                <a:solidFill>
+                  <a:srgbClr val="003B4F"/>
+                </a:solidFill>
+                <a:latin typeface="Courier"/>
+              </a:rPr>
+              <a:t> </a:t>
+            </a:r>
+            <a:r>
+              <a:rPr>
+                <a:solidFill>
+                  <a:srgbClr val="4758AB"/>
+                </a:solidFill>
+                <a:latin typeface="Courier"/>
+              </a:rPr>
+              <a:t>colorRampPalette</a:t>
+            </a:r>
+            <a:r>
+              <a:rPr>
+                <a:solidFill>
+                  <a:srgbClr val="003B4F"/>
+                </a:solidFill>
+                <a:latin typeface="Courier"/>
+              </a:rPr>
+              <a:t>(</a:t>
+            </a:r>
+            <a:r>
+              <a:rPr>
+                <a:solidFill>
+                  <a:srgbClr val="4758AB"/>
+                </a:solidFill>
+                <a:latin typeface="Courier"/>
+              </a:rPr>
+              <a:t>c</a:t>
+            </a:r>
+            <a:r>
+              <a:rPr>
+                <a:solidFill>
+                  <a:srgbClr val="003B4F"/>
+                </a:solidFill>
+                <a:latin typeface="Courier"/>
+              </a:rPr>
+              <a:t>(</a:t>
+            </a:r>
+            <a:r>
+              <a:rPr>
+                <a:solidFill>
                   <a:srgbClr val="20794D"/>
                 </a:solidFill>
                 <a:latin typeface="Courier"/>
               </a:rPr>
-              <a:t>"HC"</a:t>
-            </a:r>
-            <a:r>
-              <a:rPr>
-                <a:solidFill>
-                  <a:srgbClr val="003B4F"/>
-                </a:solidFill>
-                <a:latin typeface="Courier"/>
-              </a:rPr>
-              <a:t>) </a:t>
-            </a:r>
-            <a:r>
-              <a:rPr>
-                <a:solidFill>
-                  <a:srgbClr val="5E5E5E"/>
-                </a:solidFill>
-                <a:latin typeface="Courier"/>
-              </a:rPr>
-              <a:t>%&gt;%</a:t>
-            </a:r>
-            <a:br/>
-            <a:r>
-              <a:rPr>
-                <a:solidFill>
-                  <a:srgbClr val="003B4F"/>
-                </a:solidFill>
-                <a:latin typeface="Courier"/>
-              </a:rPr>
-              <a:t>  </a:t>
-            </a:r>
-            <a:r>
-              <a:rPr>
-                <a:solidFill>
-                  <a:srgbClr val="4758AB"/>
-                </a:solidFill>
-                <a:latin typeface="Courier"/>
-              </a:rPr>
-              <a:t>select</a:t>
-            </a:r>
-            <a:r>
-              <a:rPr>
-                <a:solidFill>
-                  <a:srgbClr val="003B4F"/>
-                </a:solidFill>
-                <a:latin typeface="Courier"/>
-              </a:rPr>
-              <a:t>(IL1R1) </a:t>
-            </a:r>
-            <a:r>
-              <a:rPr>
-                <a:solidFill>
-                  <a:srgbClr val="5E5E5E"/>
-                </a:solidFill>
-                <a:latin typeface="Courier"/>
-              </a:rPr>
-              <a:t>%&gt;%</a:t>
-            </a:r>
-            <a:br/>
-            <a:r>
-              <a:rPr>
-                <a:solidFill>
-                  <a:srgbClr val="003B4F"/>
-                </a:solidFill>
-                <a:latin typeface="Courier"/>
-              </a:rPr>
-              <a:t>  </a:t>
-            </a:r>
-            <a:r>
-              <a:rPr>
-                <a:solidFill>
-                  <a:srgbClr val="4758AB"/>
-                </a:solidFill>
-                <a:latin typeface="Courier"/>
-              </a:rPr>
-              <a:t>summarize</a:t>
-            </a:r>
-            <a:r>
-              <a:rPr>
-                <a:solidFill>
-                  <a:srgbClr val="003B4F"/>
-                </a:solidFill>
-                <a:latin typeface="Courier"/>
-              </a:rPr>
-              <a:t>(</a:t>
+              <a:t>"darkorchid3"</a:t>
+            </a:r>
+            <a:r>
+              <a:rPr>
+                <a:solidFill>
+                  <a:srgbClr val="003B4F"/>
+                </a:solidFill>
+                <a:latin typeface="Courier"/>
+              </a:rPr>
+              <a:t>, </a:t>
+            </a:r>
+            <a:r>
+              <a:rPr>
+                <a:solidFill>
+                  <a:srgbClr val="20794D"/>
+                </a:solidFill>
+                <a:latin typeface="Courier"/>
+              </a:rPr>
+              <a:t>"linen"</a:t>
+            </a:r>
+            <a:r>
+              <a:rPr>
+                <a:solidFill>
+                  <a:srgbClr val="003B4F"/>
+                </a:solidFill>
+                <a:latin typeface="Courier"/>
+              </a:rPr>
+              <a:t>, </a:t>
+            </a:r>
+            <a:r>
+              <a:rPr>
+                <a:solidFill>
+                  <a:srgbClr val="20794D"/>
+                </a:solidFill>
+                <a:latin typeface="Courier"/>
+              </a:rPr>
+              <a:t>"limegreen"</a:t>
+            </a:r>
+            <a:r>
+              <a:rPr>
+                <a:solidFill>
+                  <a:srgbClr val="003B4F"/>
+                </a:solidFill>
+                <a:latin typeface="Courier"/>
+              </a:rPr>
+              <a:t>))(</a:t>
+            </a:r>
+            <a:r>
+              <a:rPr>
+                <a:solidFill>
+                  <a:srgbClr val="AD0000"/>
+                </a:solidFill>
+                <a:latin typeface="Courier"/>
+              </a:rPr>
+              <a:t>100</a:t>
+            </a:r>
+            <a:r>
+              <a:rPr>
+                <a:solidFill>
+                  <a:srgbClr val="003B4F"/>
+                </a:solidFill>
+                <a:latin typeface="Courier"/>
+              </a:rPr>
+              <a:t>), </a:t>
             </a:r>
             <a:r>
               <a:rPr>
@@ -5501,7 +6635,7 @@
                 </a:solidFill>
                 <a:latin typeface="Courier"/>
               </a:rPr>
-              <a:t>meanIL1R1 =</a:t>
+              <a:t>border_color =</a:t>
             </a:r>
             <a:r>
               <a:rPr>
@@ -5515,38 +6649,54 @@
             <a:r>
               <a:rPr>
                 <a:solidFill>
-                  <a:srgbClr val="4758AB"/>
-                </a:solidFill>
-                <a:latin typeface="Courier"/>
-              </a:rPr>
-              <a:t>mean</a:t>
-            </a:r>
-            <a:r>
-              <a:rPr>
-                <a:solidFill>
-                  <a:srgbClr val="003B4F"/>
-                </a:solidFill>
-                <a:latin typeface="Courier"/>
-              </a:rPr>
-              <a:t>(IL1R1))</a:t>
-            </a:r>
-          </a:p>
-          <a:p>
-            <a:pPr lvl="0" indent="0">
-              <a:buNone/>
-            </a:pPr>
-            <a:r>
-              <a:rPr>
-                <a:latin typeface="Courier"/>
-              </a:rPr>
-              <a:t># A tibble: 1 × 1
-  meanIL1R1
-      &lt;dbl&gt;
-1       5.2</a:t>
+                  <a:srgbClr val="20794D"/>
+                </a:solidFill>
+                <a:latin typeface="Courier"/>
+              </a:rPr>
+              <a:t>"white"</a:t>
+            </a:r>
+            <a:r>
+              <a:rPr>
+                <a:solidFill>
+                  <a:srgbClr val="003B4F"/>
+                </a:solidFill>
+                <a:latin typeface="Courier"/>
+              </a:rPr>
+              <a:t>)</a:t>
             </a:r>
           </a:p>
         </p:txBody>
       </p:sp>
+      <p:pic>
+        <p:nvPicPr>
+          <p:cNvPr descr="99_slides_with_code_files/figure-pptx/pheatmap%20minicovid-1.png" id="0" name="Picture 1"/>
+          <p:cNvPicPr>
+            <a:picLocks noGrp="1" noChangeAspect="1"/>
+          </p:cNvPicPr>
+          <p:nvPr/>
+        </p:nvPicPr>
+        <p:blipFill>
+          <a:blip r:embed="rId2"/>
+          <a:stretch>
+            <a:fillRect/>
+          </a:stretch>
+        </p:blipFill>
+        <p:spPr bwMode="auto">
+          <a:xfrm>
+            <a:off x="3568700" y="1117600"/>
+            <a:ext cx="5105400" cy="2552700"/>
+          </a:xfrm>
+          <a:prstGeom prst="rect">
+            <a:avLst/>
+          </a:prstGeom>
+          <a:noFill/>
+          <a:ln w="9525">
+            <a:noFill/>
+            <a:headEnd/>
+            <a:tailEnd/>
+          </a:ln>
+        </p:spPr>
+      </p:pic>
     </p:spTree>
   </p:cSld>
 </p:sld>
@@ -5589,6 +6739,280 @@
             </a:pPr>
             <a:r>
               <a:rPr/>
+              <a:t>Simple dplyr</a:t>
+            </a:r>
+          </a:p>
+        </p:txBody>
+      </p:sp>
+      <p:sp>
+        <p:nvSpPr>
+          <p:cNvPr id="3" name="Content Placeholder 2"/>
+          <p:cNvSpPr>
+            <a:spLocks noGrp="1"/>
+          </p:cNvSpPr>
+          <p:nvPr>
+            <p:ph idx="1"/>
+          </p:nvPr>
+        </p:nvSpPr>
+        <p:spPr/>
+        <p:txBody>
+          <a:bodyPr/>
+          <a:lstStyle/>
+          <a:p>
+            <a:pPr lvl="0" indent="0">
+              <a:buNone/>
+            </a:pPr>
+            <a:r>
+              <a:rPr>
+                <a:solidFill>
+                  <a:srgbClr val="003B4F"/>
+                </a:solidFill>
+                <a:latin typeface="Courier"/>
+              </a:rPr>
+              <a:t>covid </a:t>
+            </a:r>
+            <a:r>
+              <a:rPr>
+                <a:solidFill>
+                  <a:srgbClr val="5E5E5E"/>
+                </a:solidFill>
+                <a:latin typeface="Courier"/>
+              </a:rPr>
+              <a:t>%&gt;%</a:t>
+            </a:r>
+            <a:br/>
+            <a:r>
+              <a:rPr>
+                <a:solidFill>
+                  <a:srgbClr val="003B4F"/>
+                </a:solidFill>
+                <a:latin typeface="Courier"/>
+              </a:rPr>
+              <a:t>  </a:t>
+            </a:r>
+            <a:r>
+              <a:rPr>
+                <a:solidFill>
+                  <a:srgbClr val="4758AB"/>
+                </a:solidFill>
+                <a:latin typeface="Courier"/>
+              </a:rPr>
+              <a:t>filter</a:t>
+            </a:r>
+            <a:r>
+              <a:rPr>
+                <a:solidFill>
+                  <a:srgbClr val="003B4F"/>
+                </a:solidFill>
+                <a:latin typeface="Courier"/>
+              </a:rPr>
+              <a:t>(status </a:t>
+            </a:r>
+            <a:r>
+              <a:rPr>
+                <a:solidFill>
+                  <a:srgbClr val="5E5E5E"/>
+                </a:solidFill>
+                <a:latin typeface="Courier"/>
+              </a:rPr>
+              <a:t>==</a:t>
+            </a:r>
+            <a:r>
+              <a:rPr>
+                <a:solidFill>
+                  <a:srgbClr val="003B4F"/>
+                </a:solidFill>
+                <a:latin typeface="Courier"/>
+              </a:rPr>
+              <a:t> </a:t>
+            </a:r>
+            <a:r>
+              <a:rPr>
+                <a:solidFill>
+                  <a:srgbClr val="20794D"/>
+                </a:solidFill>
+                <a:latin typeface="Courier"/>
+              </a:rPr>
+              <a:t>"HC"</a:t>
+            </a:r>
+            <a:r>
+              <a:rPr>
+                <a:solidFill>
+                  <a:srgbClr val="003B4F"/>
+                </a:solidFill>
+                <a:latin typeface="Courier"/>
+              </a:rPr>
+              <a:t>) </a:t>
+            </a:r>
+            <a:r>
+              <a:rPr>
+                <a:solidFill>
+                  <a:srgbClr val="5E5E5E"/>
+                </a:solidFill>
+                <a:latin typeface="Courier"/>
+              </a:rPr>
+              <a:t>%&gt;%</a:t>
+            </a:r>
+            <a:br/>
+            <a:r>
+              <a:rPr>
+                <a:solidFill>
+                  <a:srgbClr val="003B4F"/>
+                </a:solidFill>
+                <a:latin typeface="Courier"/>
+              </a:rPr>
+              <a:t>  </a:t>
+            </a:r>
+            <a:r>
+              <a:rPr>
+                <a:solidFill>
+                  <a:srgbClr val="4758AB"/>
+                </a:solidFill>
+                <a:latin typeface="Courier"/>
+              </a:rPr>
+              <a:t>select</a:t>
+            </a:r>
+            <a:r>
+              <a:rPr>
+                <a:solidFill>
+                  <a:srgbClr val="003B4F"/>
+                </a:solidFill>
+                <a:latin typeface="Courier"/>
+              </a:rPr>
+              <a:t>(IL1R1) </a:t>
+            </a:r>
+            <a:r>
+              <a:rPr>
+                <a:solidFill>
+                  <a:srgbClr val="5E5E5E"/>
+                </a:solidFill>
+                <a:latin typeface="Courier"/>
+              </a:rPr>
+              <a:t>%&gt;%</a:t>
+            </a:r>
+            <a:br/>
+            <a:r>
+              <a:rPr>
+                <a:solidFill>
+                  <a:srgbClr val="003B4F"/>
+                </a:solidFill>
+                <a:latin typeface="Courier"/>
+              </a:rPr>
+              <a:t>  </a:t>
+            </a:r>
+            <a:r>
+              <a:rPr>
+                <a:solidFill>
+                  <a:srgbClr val="4758AB"/>
+                </a:solidFill>
+                <a:latin typeface="Courier"/>
+              </a:rPr>
+              <a:t>summarize</a:t>
+            </a:r>
+            <a:r>
+              <a:rPr>
+                <a:solidFill>
+                  <a:srgbClr val="003B4F"/>
+                </a:solidFill>
+                <a:latin typeface="Courier"/>
+              </a:rPr>
+              <a:t>(</a:t>
+            </a:r>
+            <a:r>
+              <a:rPr>
+                <a:solidFill>
+                  <a:srgbClr val="657422"/>
+                </a:solidFill>
+                <a:latin typeface="Courier"/>
+              </a:rPr>
+              <a:t>meanIL1R1 =</a:t>
+            </a:r>
+            <a:r>
+              <a:rPr>
+                <a:solidFill>
+                  <a:srgbClr val="003B4F"/>
+                </a:solidFill>
+                <a:latin typeface="Courier"/>
+              </a:rPr>
+              <a:t> </a:t>
+            </a:r>
+            <a:r>
+              <a:rPr>
+                <a:solidFill>
+                  <a:srgbClr val="4758AB"/>
+                </a:solidFill>
+                <a:latin typeface="Courier"/>
+              </a:rPr>
+              <a:t>mean</a:t>
+            </a:r>
+            <a:r>
+              <a:rPr>
+                <a:solidFill>
+                  <a:srgbClr val="003B4F"/>
+                </a:solidFill>
+                <a:latin typeface="Courier"/>
+              </a:rPr>
+              <a:t>(IL1R1))</a:t>
+            </a:r>
+          </a:p>
+          <a:p>
+            <a:pPr lvl="0" indent="0">
+              <a:buNone/>
+            </a:pPr>
+            <a:r>
+              <a:rPr>
+                <a:latin typeface="Courier"/>
+              </a:rPr>
+              <a:t># A tibble: 1 × 1
+  meanIL1R1
+      &lt;dbl&gt;
+1       5.2</a:t>
+            </a:r>
+          </a:p>
+        </p:txBody>
+      </p:sp>
+    </p:spTree>
+  </p:cSld>
+</p:sld>
+</file>
+
+<file path=ppt/slides/slide7.xml><?xml version="1.0" encoding="utf-8"?>
+<p:sld xmlns:a="http://schemas.openxmlformats.org/drawingml/2006/main" xmlns:r="http://schemas.openxmlformats.org/officeDocument/2006/relationships" xmlns:p="http://schemas.openxmlformats.org/presentationml/2006/main">
+  <p:cSld>
+    <p:spTree>
+      <p:nvGrpSpPr>
+        <p:cNvPr id="1" name=""/>
+        <p:cNvGrpSpPr/>
+        <p:nvPr/>
+      </p:nvGrpSpPr>
+      <p:grpSpPr>
+        <a:xfrm>
+          <a:off x="0" y="0"/>
+          <a:ext cx="0" cy="0"/>
+          <a:chOff x="0" y="0"/>
+          <a:chExt cx="0" cy="0"/>
+        </a:xfrm>
+      </p:grpSpPr>
+      <p:sp>
+        <p:nvSpPr>
+          <p:cNvPr id="2" name="Title 1"/>
+          <p:cNvSpPr>
+            <a:spLocks noGrp="1"/>
+          </p:cNvSpPr>
+          <p:nvPr>
+            <p:ph type="title"/>
+          </p:nvPr>
+        </p:nvSpPr>
+        <p:spPr/>
+        <p:txBody>
+          <a:bodyPr/>
+          <a:lstStyle/>
+          <a:p>
+            <a:pPr lvl="0" indent="0" marL="0">
+              <a:buNone/>
+            </a:pPr>
+            <a:r>
+              <a:rPr/>
               <a:t>Grouping and summarizing</a:t>
             </a:r>
           </a:p>
@@ -5913,7 +7337,7 @@
 </p:sld>
 </file>
 
-<file path=ppt/slides/slide7.xml><?xml version="1.0" encoding="utf-8"?>
+<file path=ppt/slides/slide8.xml><?xml version="1.0" encoding="utf-8"?>
 <p:sld xmlns:a="http://schemas.openxmlformats.org/drawingml/2006/main" xmlns:r="http://schemas.openxmlformats.org/officeDocument/2006/relationships" xmlns:p="http://schemas.openxmlformats.org/presentationml/2006/main">
   <p:cSld>
     <p:spTree>
@@ -5955,7 +7379,7 @@
             </a:pPr>
             <a:r>
               <a:rPr/>
-              <a:t>Patchwork</a:t>
+              <a:t>Barplot of the number of observations per subject</a:t>
             </a:r>
           </a:p>
         </p:txBody>
@@ -5985,7 +7409,7 @@
                 </a:solidFill>
                 <a:latin typeface="Courier"/>
               </a:rPr>
-              <a:t>il1a &lt;- covid </a:t>
+              <a:t>covid </a:t>
             </a:r>
             <a:r>
               <a:rPr>
@@ -6013,16 +7437,52 @@
                 </a:solidFill>
                 <a:latin typeface="Courier"/>
               </a:rPr>
-              <a:t>filter</a:t>
-            </a:r>
-            <a:r>
-              <a:rPr>
-                <a:solidFill>
-                  <a:srgbClr val="003B4F"/>
-                </a:solidFill>
-                <a:latin typeface="Courier"/>
-              </a:rPr>
-              <a:t>(status </a:t>
+              <a:t>ggplot</a:t>
+            </a:r>
+            <a:r>
+              <a:rPr>
+                <a:solidFill>
+                  <a:srgbClr val="003B4F"/>
+                </a:solidFill>
+                <a:latin typeface="Courier"/>
+              </a:rPr>
+              <a:t>(</a:t>
+            </a:r>
+            <a:r>
+              <a:rPr>
+                <a:solidFill>
+                  <a:srgbClr val="4758AB"/>
+                </a:solidFill>
+                <a:latin typeface="Courier"/>
+              </a:rPr>
+              <a:t>aes</a:t>
+            </a:r>
+            <a:r>
+              <a:rPr>
+                <a:solidFill>
+                  <a:srgbClr val="003B4F"/>
+                </a:solidFill>
+                <a:latin typeface="Courier"/>
+              </a:rPr>
+              <a:t>(id, </a:t>
+            </a:r>
+            <a:r>
+              <a:rPr>
+                <a:solidFill>
+                  <a:srgbClr val="657422"/>
+                </a:solidFill>
+                <a:latin typeface="Courier"/>
+              </a:rPr>
+              <a:t>fill =</a:t>
+            </a:r>
+            <a:r>
+              <a:rPr>
+                <a:solidFill>
+                  <a:srgbClr val="003B4F"/>
+                </a:solidFill>
+                <a:latin typeface="Courier"/>
+              </a:rPr>
+              <a:t> id)) </a:t>
             </a:r>
             <a:r>
               <a:rPr>
@@ -6031,7 +7491,7 @@
                 </a:solidFill>
                 <a:latin typeface="Courier"/>
               </a:rPr>
-              <a:t>==</a:t>
+              <a:t>+</a:t>
             </a:r>
             <a:r>
               <a:rPr>
@@ -6042,33 +7502,6 @@
               </a:rPr>
               <a:t> </a:t>
             </a:r>
-            <a:r>
-              <a:rPr>
-                <a:solidFill>
-                  <a:srgbClr val="20794D"/>
-                </a:solidFill>
-                <a:latin typeface="Courier"/>
-              </a:rPr>
-              <a:t>"nCOV"</a:t>
-            </a:r>
-            <a:r>
-              <a:rPr>
-                <a:solidFill>
-                  <a:srgbClr val="003B4F"/>
-                </a:solidFill>
-                <a:latin typeface="Courier"/>
-              </a:rPr>
-              <a:t>) </a:t>
-            </a:r>
-            <a:r>
-              <a:rPr>
-                <a:solidFill>
-                  <a:srgbClr val="5E5E5E"/>
-                </a:solidFill>
-                <a:latin typeface="Courier"/>
-              </a:rPr>
-              <a:t>|&gt;</a:t>
-            </a:r>
             <a:br/>
             <a:r>
               <a:rPr>
@@ -6086,171 +7519,7 @@
                 </a:solidFill>
                 <a:latin typeface="Courier"/>
               </a:rPr>
-              <a:t>ggplot</a:t>
-            </a:r>
-            <a:r>
-              <a:rPr>
-                <a:solidFill>
-                  <a:srgbClr val="003B4F"/>
-                </a:solidFill>
-                <a:latin typeface="Courier"/>
-              </a:rPr>
-              <a:t>(</a:t>
-            </a:r>
-            <a:r>
-              <a:rPr>
-                <a:solidFill>
-                  <a:srgbClr val="4758AB"/>
-                </a:solidFill>
-                <a:latin typeface="Courier"/>
-              </a:rPr>
-              <a:t>aes</a:t>
-            </a:r>
-            <a:r>
-              <a:rPr>
-                <a:solidFill>
-                  <a:srgbClr val="003B4F"/>
-                </a:solidFill>
-                <a:latin typeface="Courier"/>
-              </a:rPr>
-              <a:t>(</a:t>
-            </a:r>
-            <a:r>
-              <a:rPr>
-                <a:solidFill>
-                  <a:srgbClr val="657422"/>
-                </a:solidFill>
-                <a:latin typeface="Courier"/>
-              </a:rPr>
-              <a:t>x =</a:t>
-            </a:r>
-            <a:r>
-              <a:rPr>
-                <a:solidFill>
-                  <a:srgbClr val="003B4F"/>
-                </a:solidFill>
-                <a:latin typeface="Courier"/>
-              </a:rPr>
-              <a:t> time, </a:t>
-            </a:r>
-            <a:r>
-              <a:rPr>
-                <a:solidFill>
-                  <a:srgbClr val="657422"/>
-                </a:solidFill>
-                <a:latin typeface="Courier"/>
-              </a:rPr>
-              <a:t>y =</a:t>
-            </a:r>
-            <a:r>
-              <a:rPr>
-                <a:solidFill>
-                  <a:srgbClr val="003B4F"/>
-                </a:solidFill>
-                <a:latin typeface="Courier"/>
-              </a:rPr>
-              <a:t> IL1A, </a:t>
-            </a:r>
-            <a:r>
-              <a:rPr>
-                <a:solidFill>
-                  <a:srgbClr val="657422"/>
-                </a:solidFill>
-                <a:latin typeface="Courier"/>
-              </a:rPr>
-              <a:t>color =</a:t>
-            </a:r>
-            <a:r>
-              <a:rPr>
-                <a:solidFill>
-                  <a:srgbClr val="003B4F"/>
-                </a:solidFill>
-                <a:latin typeface="Courier"/>
-              </a:rPr>
-              <a:t> id)) </a:t>
-            </a:r>
-            <a:r>
-              <a:rPr>
-                <a:solidFill>
-                  <a:srgbClr val="5E5E5E"/>
-                </a:solidFill>
-                <a:latin typeface="Courier"/>
-              </a:rPr>
-              <a:t>+</a:t>
-            </a:r>
-            <a:r>
-              <a:rPr>
-                <a:solidFill>
-                  <a:srgbClr val="003B4F"/>
-                </a:solidFill>
-                <a:latin typeface="Courier"/>
-              </a:rPr>
-              <a:t> </a:t>
-            </a:r>
-            <a:br/>
-            <a:r>
-              <a:rPr>
-                <a:solidFill>
-                  <a:srgbClr val="003B4F"/>
-                </a:solidFill>
-                <a:latin typeface="Courier"/>
-              </a:rPr>
-              <a:t>  </a:t>
-            </a:r>
-            <a:r>
-              <a:rPr>
-                <a:solidFill>
-                  <a:srgbClr val="4758AB"/>
-                </a:solidFill>
-                <a:latin typeface="Courier"/>
-              </a:rPr>
-              <a:t>geom_point</a:t>
-            </a:r>
-            <a:r>
-              <a:rPr>
-                <a:solidFill>
-                  <a:srgbClr val="003B4F"/>
-                </a:solidFill>
-                <a:latin typeface="Courier"/>
-              </a:rPr>
-              <a:t>() </a:t>
-            </a:r>
-            <a:r>
-              <a:rPr>
-                <a:solidFill>
-                  <a:srgbClr val="5E5E5E"/>
-                </a:solidFill>
-                <a:latin typeface="Courier"/>
-              </a:rPr>
-              <a:t>+</a:t>
-            </a:r>
-            <a:r>
-              <a:rPr>
-                <a:solidFill>
-                  <a:srgbClr val="003B4F"/>
-                </a:solidFill>
-                <a:latin typeface="Courier"/>
-              </a:rPr>
-              <a:t> </a:t>
-            </a:r>
-            <a:br/>
-            <a:r>
-              <a:rPr>
-                <a:solidFill>
-                  <a:srgbClr val="003B4F"/>
-                </a:solidFill>
-                <a:latin typeface="Courier"/>
-              </a:rPr>
-              <a:t>  </a:t>
-            </a:r>
-            <a:r>
-              <a:rPr>
-                <a:solidFill>
-                  <a:srgbClr val="4758AB"/>
-                </a:solidFill>
-                <a:latin typeface="Courier"/>
-              </a:rPr>
-              <a:t>geom_line</a:t>
+              <a:t>geom_bar</a:t>
             </a:r>
             <a:r>
               <a:rPr>
@@ -6260,546 +7529,13 @@
                 <a:latin typeface="Courier"/>
               </a:rPr>
               <a:t>()</a:t>
-            </a:r>
-            <a:br/>
-            <a:br/>
-            <a:br/>
-            <a:r>
-              <a:rPr>
-                <a:solidFill>
-                  <a:srgbClr val="003B4F"/>
-                </a:solidFill>
-                <a:latin typeface="Courier"/>
-              </a:rPr>
-              <a:t>il1b &lt;- covid </a:t>
-            </a:r>
-            <a:r>
-              <a:rPr>
-                <a:solidFill>
-                  <a:srgbClr val="5E5E5E"/>
-                </a:solidFill>
-                <a:latin typeface="Courier"/>
-              </a:rPr>
-              <a:t>|&gt;</a:t>
-            </a:r>
-            <a:br/>
-            <a:r>
-              <a:rPr>
-                <a:solidFill>
-                  <a:srgbClr val="003B4F"/>
-                </a:solidFill>
-                <a:latin typeface="Courier"/>
-              </a:rPr>
-              <a:t>  </a:t>
-            </a:r>
-            <a:r>
-              <a:rPr>
-                <a:solidFill>
-                  <a:srgbClr val="4758AB"/>
-                </a:solidFill>
-                <a:latin typeface="Courier"/>
-              </a:rPr>
-              <a:t>filter</a:t>
-            </a:r>
-            <a:r>
-              <a:rPr>
-                <a:solidFill>
-                  <a:srgbClr val="003B4F"/>
-                </a:solidFill>
-                <a:latin typeface="Courier"/>
-              </a:rPr>
-              <a:t>(status </a:t>
-            </a:r>
-            <a:r>
-              <a:rPr>
-                <a:solidFill>
-                  <a:srgbClr val="5E5E5E"/>
-                </a:solidFill>
-                <a:latin typeface="Courier"/>
-              </a:rPr>
-              <a:t>==</a:t>
-            </a:r>
-            <a:r>
-              <a:rPr>
-                <a:solidFill>
-                  <a:srgbClr val="003B4F"/>
-                </a:solidFill>
-                <a:latin typeface="Courier"/>
-              </a:rPr>
-              <a:t> </a:t>
-            </a:r>
-            <a:r>
-              <a:rPr>
-                <a:solidFill>
-                  <a:srgbClr val="20794D"/>
-                </a:solidFill>
-                <a:latin typeface="Courier"/>
-              </a:rPr>
-              <a:t>"nCOV"</a:t>
-            </a:r>
-            <a:r>
-              <a:rPr>
-                <a:solidFill>
-                  <a:srgbClr val="003B4F"/>
-                </a:solidFill>
-                <a:latin typeface="Courier"/>
-              </a:rPr>
-              <a:t>) </a:t>
-            </a:r>
-            <a:r>
-              <a:rPr>
-                <a:solidFill>
-                  <a:srgbClr val="5E5E5E"/>
-                </a:solidFill>
-                <a:latin typeface="Courier"/>
-              </a:rPr>
-              <a:t>|&gt;</a:t>
-            </a:r>
-            <a:br/>
-            <a:r>
-              <a:rPr>
-                <a:solidFill>
-                  <a:srgbClr val="003B4F"/>
-                </a:solidFill>
-                <a:latin typeface="Courier"/>
-              </a:rPr>
-              <a:t>  </a:t>
-            </a:r>
-            <a:r>
-              <a:rPr>
-                <a:solidFill>
-                  <a:srgbClr val="4758AB"/>
-                </a:solidFill>
-                <a:latin typeface="Courier"/>
-              </a:rPr>
-              <a:t>ggplot</a:t>
-            </a:r>
-            <a:r>
-              <a:rPr>
-                <a:solidFill>
-                  <a:srgbClr val="003B4F"/>
-                </a:solidFill>
-                <a:latin typeface="Courier"/>
-              </a:rPr>
-              <a:t>(</a:t>
-            </a:r>
-            <a:r>
-              <a:rPr>
-                <a:solidFill>
-                  <a:srgbClr val="4758AB"/>
-                </a:solidFill>
-                <a:latin typeface="Courier"/>
-              </a:rPr>
-              <a:t>aes</a:t>
-            </a:r>
-            <a:r>
-              <a:rPr>
-                <a:solidFill>
-                  <a:srgbClr val="003B4F"/>
-                </a:solidFill>
-                <a:latin typeface="Courier"/>
-              </a:rPr>
-              <a:t>(</a:t>
-            </a:r>
-            <a:r>
-              <a:rPr>
-                <a:solidFill>
-                  <a:srgbClr val="657422"/>
-                </a:solidFill>
-                <a:latin typeface="Courier"/>
-              </a:rPr>
-              <a:t>x =</a:t>
-            </a:r>
-            <a:r>
-              <a:rPr>
-                <a:solidFill>
-                  <a:srgbClr val="003B4F"/>
-                </a:solidFill>
-                <a:latin typeface="Courier"/>
-              </a:rPr>
-              <a:t> time, </a:t>
-            </a:r>
-            <a:r>
-              <a:rPr>
-                <a:solidFill>
-                  <a:srgbClr val="657422"/>
-                </a:solidFill>
-                <a:latin typeface="Courier"/>
-              </a:rPr>
-              <a:t>y =</a:t>
-            </a:r>
-            <a:r>
-              <a:rPr>
-                <a:solidFill>
-                  <a:srgbClr val="003B4F"/>
-                </a:solidFill>
-                <a:latin typeface="Courier"/>
-              </a:rPr>
-              <a:t> IL1B, </a:t>
-            </a:r>
-            <a:r>
-              <a:rPr>
-                <a:solidFill>
-                  <a:srgbClr val="657422"/>
-                </a:solidFill>
-                <a:latin typeface="Courier"/>
-              </a:rPr>
-              <a:t>color =</a:t>
-            </a:r>
-            <a:r>
-              <a:rPr>
-                <a:solidFill>
-                  <a:srgbClr val="003B4F"/>
-                </a:solidFill>
-                <a:latin typeface="Courier"/>
-              </a:rPr>
-              <a:t> id)) </a:t>
-            </a:r>
-            <a:r>
-              <a:rPr>
-                <a:solidFill>
-                  <a:srgbClr val="5E5E5E"/>
-                </a:solidFill>
-                <a:latin typeface="Courier"/>
-              </a:rPr>
-              <a:t>+</a:t>
-            </a:r>
-            <a:r>
-              <a:rPr>
-                <a:solidFill>
-                  <a:srgbClr val="003B4F"/>
-                </a:solidFill>
-                <a:latin typeface="Courier"/>
-              </a:rPr>
-              <a:t> </a:t>
-            </a:r>
-            <a:br/>
-            <a:r>
-              <a:rPr>
-                <a:solidFill>
-                  <a:srgbClr val="003B4F"/>
-                </a:solidFill>
-                <a:latin typeface="Courier"/>
-              </a:rPr>
-              <a:t>  </a:t>
-            </a:r>
-            <a:r>
-              <a:rPr>
-                <a:solidFill>
-                  <a:srgbClr val="4758AB"/>
-                </a:solidFill>
-                <a:latin typeface="Courier"/>
-              </a:rPr>
-              <a:t>geom_point</a:t>
-            </a:r>
-            <a:r>
-              <a:rPr>
-                <a:solidFill>
-                  <a:srgbClr val="003B4F"/>
-                </a:solidFill>
-                <a:latin typeface="Courier"/>
-              </a:rPr>
-              <a:t>() </a:t>
-            </a:r>
-            <a:r>
-              <a:rPr>
-                <a:solidFill>
-                  <a:srgbClr val="5E5E5E"/>
-                </a:solidFill>
-                <a:latin typeface="Courier"/>
-              </a:rPr>
-              <a:t>+</a:t>
-            </a:r>
-            <a:r>
-              <a:rPr>
-                <a:solidFill>
-                  <a:srgbClr val="003B4F"/>
-                </a:solidFill>
-                <a:latin typeface="Courier"/>
-              </a:rPr>
-              <a:t> </a:t>
-            </a:r>
-            <a:br/>
-            <a:r>
-              <a:rPr>
-                <a:solidFill>
-                  <a:srgbClr val="003B4F"/>
-                </a:solidFill>
-                <a:latin typeface="Courier"/>
-              </a:rPr>
-              <a:t>  </a:t>
-            </a:r>
-            <a:r>
-              <a:rPr>
-                <a:solidFill>
-                  <a:srgbClr val="4758AB"/>
-                </a:solidFill>
-                <a:latin typeface="Courier"/>
-              </a:rPr>
-              <a:t>geom_line</a:t>
-            </a:r>
-            <a:r>
-              <a:rPr>
-                <a:solidFill>
-                  <a:srgbClr val="003B4F"/>
-                </a:solidFill>
-                <a:latin typeface="Courier"/>
-              </a:rPr>
-              <a:t>()</a:t>
-            </a:r>
-            <a:br/>
-            <a:br/>
-            <a:br/>
-            <a:r>
-              <a:rPr>
-                <a:solidFill>
-                  <a:srgbClr val="5E5E5E"/>
-                </a:solidFill>
-                <a:latin typeface="Courier"/>
-              </a:rPr>
-              <a:t># il1r1 &lt;- covid |&gt;</a:t>
-            </a:r>
-            <a:br/>
-            <a:r>
-              <a:rPr>
-                <a:solidFill>
-                  <a:srgbClr val="5E5E5E"/>
-                </a:solidFill>
-                <a:latin typeface="Courier"/>
-              </a:rPr>
-              <a:t>#   filter(status == "nCOV") |&gt;</a:t>
-            </a:r>
-            <a:br/>
-            <a:r>
-              <a:rPr>
-                <a:solidFill>
-                  <a:srgbClr val="5E5E5E"/>
-                </a:solidFill>
-                <a:latin typeface="Courier"/>
-              </a:rPr>
-              <a:t>#   ggplot(aes(x = time, y = IL1R1, color = id)) + </a:t>
-            </a:r>
-            <a:br/>
-            <a:r>
-              <a:rPr>
-                <a:solidFill>
-                  <a:srgbClr val="5E5E5E"/>
-                </a:solidFill>
-                <a:latin typeface="Courier"/>
-              </a:rPr>
-              <a:t>#   geom_point() + </a:t>
-            </a:r>
-            <a:br/>
-            <a:r>
-              <a:rPr>
-                <a:solidFill>
-                  <a:srgbClr val="5E5E5E"/>
-                </a:solidFill>
-                <a:latin typeface="Courier"/>
-              </a:rPr>
-              <a:t>#   geom_line()</a:t>
-            </a:r>
-            <a:br/>
-            <a:br/>
-            <a:br/>
-            <a:r>
-              <a:rPr>
-                <a:solidFill>
-                  <a:srgbClr val="5E5E5E"/>
-                </a:solidFill>
-                <a:latin typeface="Courier"/>
-              </a:rPr>
-              <a:t># (il1a | il1b | il1r1) +</a:t>
-            </a:r>
-            <a:br/>
-            <a:r>
-              <a:rPr>
-                <a:solidFill>
-                  <a:srgbClr val="003B4F"/>
-                </a:solidFill>
-                <a:latin typeface="Courier"/>
-              </a:rPr>
-              <a:t>(il1a </a:t>
-            </a:r>
-            <a:r>
-              <a:rPr>
-                <a:solidFill>
-                  <a:srgbClr val="5E5E5E"/>
-                </a:solidFill>
-                <a:latin typeface="Courier"/>
-              </a:rPr>
-              <a:t>|</a:t>
-            </a:r>
-            <a:r>
-              <a:rPr>
-                <a:solidFill>
-                  <a:srgbClr val="003B4F"/>
-                </a:solidFill>
-                <a:latin typeface="Courier"/>
-              </a:rPr>
-              <a:t> il1b ) </a:t>
-            </a:r>
-            <a:r>
-              <a:rPr>
-                <a:solidFill>
-                  <a:srgbClr val="5E5E5E"/>
-                </a:solidFill>
-                <a:latin typeface="Courier"/>
-              </a:rPr>
-              <a:t>+</a:t>
-            </a:r>
-            <a:br/>
-            <a:r>
-              <a:rPr>
-                <a:solidFill>
-                  <a:srgbClr val="003B4F"/>
-                </a:solidFill>
-                <a:latin typeface="Courier"/>
-              </a:rPr>
-              <a:t>  </a:t>
-            </a:r>
-            <a:r>
-              <a:rPr>
-                <a:solidFill>
-                  <a:srgbClr val="4758AB"/>
-                </a:solidFill>
-                <a:latin typeface="Courier"/>
-              </a:rPr>
-              <a:t>plot_layout</a:t>
-            </a:r>
-            <a:r>
-              <a:rPr>
-                <a:solidFill>
-                  <a:srgbClr val="003B4F"/>
-                </a:solidFill>
-                <a:latin typeface="Courier"/>
-              </a:rPr>
-              <a:t>(</a:t>
-            </a:r>
-            <a:r>
-              <a:rPr>
-                <a:solidFill>
-                  <a:srgbClr val="657422"/>
-                </a:solidFill>
-                <a:latin typeface="Courier"/>
-              </a:rPr>
-              <a:t>guides =</a:t>
-            </a:r>
-            <a:r>
-              <a:rPr>
-                <a:solidFill>
-                  <a:srgbClr val="003B4F"/>
-                </a:solidFill>
-                <a:latin typeface="Courier"/>
-              </a:rPr>
-              <a:t> </a:t>
-            </a:r>
-            <a:r>
-              <a:rPr>
-                <a:solidFill>
-                  <a:srgbClr val="20794D"/>
-                </a:solidFill>
-                <a:latin typeface="Courier"/>
-              </a:rPr>
-              <a:t>"collect"</a:t>
-            </a:r>
-            <a:r>
-              <a:rPr>
-                <a:solidFill>
-                  <a:srgbClr val="003B4F"/>
-                </a:solidFill>
-                <a:latin typeface="Courier"/>
-              </a:rPr>
-              <a:t>) </a:t>
-            </a:r>
-            <a:r>
-              <a:rPr>
-                <a:solidFill>
-                  <a:srgbClr val="5E5E5E"/>
-                </a:solidFill>
-                <a:latin typeface="Courier"/>
-              </a:rPr>
-              <a:t>&amp;</a:t>
-            </a:r>
-            <a:r>
-              <a:rPr>
-                <a:solidFill>
-                  <a:srgbClr val="003B4F"/>
-                </a:solidFill>
-                <a:latin typeface="Courier"/>
-              </a:rPr>
-              <a:t> </a:t>
-            </a:r>
-            <a:br/>
-            <a:r>
-              <a:rPr>
-                <a:solidFill>
-                  <a:srgbClr val="003B4F"/>
-                </a:solidFill>
-                <a:latin typeface="Courier"/>
-              </a:rPr>
-              <a:t>  </a:t>
-            </a:r>
-            <a:r>
-              <a:rPr>
-                <a:solidFill>
-                  <a:srgbClr val="4758AB"/>
-                </a:solidFill>
-                <a:latin typeface="Courier"/>
-              </a:rPr>
-              <a:t>theme</a:t>
-            </a:r>
-            <a:r>
-              <a:rPr>
-                <a:solidFill>
-                  <a:srgbClr val="003B4F"/>
-                </a:solidFill>
-                <a:latin typeface="Courier"/>
-              </a:rPr>
-              <a:t>(</a:t>
-            </a:r>
-            <a:r>
-              <a:rPr>
-                <a:solidFill>
-                  <a:srgbClr val="657422"/>
-                </a:solidFill>
-                <a:latin typeface="Courier"/>
-              </a:rPr>
-              <a:t>legend.position =</a:t>
-            </a:r>
-            <a:r>
-              <a:rPr>
-                <a:solidFill>
-                  <a:srgbClr val="003B4F"/>
-                </a:solidFill>
-                <a:latin typeface="Courier"/>
-              </a:rPr>
-              <a:t> </a:t>
-            </a:r>
-            <a:r>
-              <a:rPr>
-                <a:solidFill>
-                  <a:srgbClr val="20794D"/>
-                </a:solidFill>
-                <a:latin typeface="Courier"/>
-              </a:rPr>
-              <a:t>"bottom"</a:t>
-            </a:r>
-            <a:r>
-              <a:rPr>
-                <a:solidFill>
-                  <a:srgbClr val="003B4F"/>
-                </a:solidFill>
-                <a:latin typeface="Courier"/>
-              </a:rPr>
-              <a:t>)</a:t>
             </a:r>
           </a:p>
         </p:txBody>
       </p:sp>
       <p:pic>
         <p:nvPicPr>
-          <p:cNvPr descr="99_slides_with_code_files/figure-pptx/pathchwork%20of%20plots-1.png" id="0" name="Picture 1"/>
+          <p:cNvPr descr="99_slides_with_code_files/figure-pptx/unnamed-chunk-3-1.png" id="0" name="Picture 1"/>
           <p:cNvPicPr>
             <a:picLocks noGrp="1" noChangeAspect="1"/>
           </p:cNvPicPr>
@@ -6827,6 +7563,288 @@
           </a:ln>
         </p:spPr>
       </p:pic>
+    </p:spTree>
+  </p:cSld>
+</p:sld>
+</file>
+
+<file path=ppt/slides/slide9.xml><?xml version="1.0" encoding="utf-8"?>
+<p:sld xmlns:a="http://schemas.openxmlformats.org/drawingml/2006/main" xmlns:r="http://schemas.openxmlformats.org/officeDocument/2006/relationships" xmlns:p="http://schemas.openxmlformats.org/presentationml/2006/main">
+  <p:cSld>
+    <p:spTree>
+      <p:nvGrpSpPr>
+        <p:cNvPr id="1" name=""/>
+        <p:cNvGrpSpPr/>
+        <p:nvPr/>
+      </p:nvGrpSpPr>
+      <p:grpSpPr>
+        <a:xfrm>
+          <a:off x="0" y="0"/>
+          <a:ext cx="0" cy="0"/>
+          <a:chOff x="0" y="0"/>
+          <a:chExt cx="0" cy="0"/>
+        </a:xfrm>
+      </p:grpSpPr>
+      <p:sp>
+        <p:nvSpPr>
+          <p:cNvPr id="2" name="Title 1"/>
+          <p:cNvSpPr>
+            <a:spLocks noGrp="1"/>
+          </p:cNvSpPr>
+          <p:nvPr>
+            <p:ph type="title"/>
+          </p:nvPr>
+        </p:nvSpPr>
+        <p:spPr/>
+        <p:txBody>
+          <a:bodyPr/>
+          <a:lstStyle/>
+          <a:p>
+            <a:pPr lvl="0" indent="0" marL="0">
+              <a:buNone/>
+            </a:pPr>
+            <a:r>
+              <a:rPr/>
+              <a:t>Implémentation dans ggplot2</a:t>
+            </a:r>
+          </a:p>
+        </p:txBody>
+      </p:sp>
+      <p:graphicFrame>
+        <p:nvGraphicFramePr>
+          <p:cNvPr id="6" name="Content Placeholder 5"/>
+          <p:cNvGraphicFramePr>
+            <a:graphicFrameLocks noGrp="1"/>
+          </p:cNvGraphicFramePr>
+          <p:nvPr>
+            <p:ph idx="1"/>
+          </p:nvPr>
+        </p:nvGraphicFramePr>
+        <p:xfrm>
+          <a:off x="457200" y="1193800"/>
+          <a:ext cx="8229600" cy="3390900"/>
+        </p:xfrm>
+        <a:graphic>
+          <a:graphicData uri="http://schemas.openxmlformats.org/drawingml/2006/table">
+            <a:tbl>
+              <a:tblPr firstRow="0" bandRow="1">
+                <a:tableStyleId>{5C22544A-7EE6-4342-B048-85BDC9FD1C3A}</a:tableStyleId>
+              </a:tblPr>
+              <a:tblGrid>
+                <a:gridCol w="2743200"/>
+                <a:gridCol w="2743200"/>
+                <a:gridCol w="2743200"/>
+              </a:tblGrid>
+              <a:tr h="0">
+                <a:tc>
+                  <a:txBody>
+                    <a:bodyPr/>
+                    <a:lstStyle/>
+                    <a:p>
+                      <a:pPr lvl="0" indent="0" marL="0" algn="ctr">
+                        <a:buNone/>
+                      </a:pPr>
+                      <a:r>
+                        <a:rPr/>
+                        <a:t>Données</a:t>
+                      </a:r>
+                    </a:p>
+                  </a:txBody>
+                </a:tc>
+                <a:tc>
+                  <a:txBody>
+                    <a:bodyPr/>
+                    <a:lstStyle/>
+                    <a:p>
+                      <a:pPr lvl="0" indent="0" marL="0" algn="l">
+                        <a:buNone/>
+                      </a:pPr>
+                      <a:r>
+                        <a:rPr>
+                          <a:latin typeface="Courier"/>
+                        </a:rPr>
+                        <a:t>data</a:t>
+                      </a:r>
+                    </a:p>
+                  </a:txBody>
+                </a:tc>
+                <a:tc>
+                  <a:txBody>
+                    <a:bodyPr/>
+                    <a:lstStyle/>
+                    <a:p>
+                      <a:pPr lvl="0" indent="0" marL="0" algn="r">
+                        <a:buNone/>
+                      </a:pPr>
+                      <a:r>
+                        <a:rPr/>
+                        <a:t>Les données à représenter. Chaque ligne représente un élément à représenter graphiquement.</a:t>
+                      </a:r>
+                    </a:p>
+                  </a:txBody>
+                </a:tc>
+              </a:tr>
+              <a:tr h="0">
+                <a:tc>
+                  <a:txBody>
+                    <a:bodyPr/>
+                    <a:lstStyle/>
+                    <a:p>
+                      <a:pPr lvl="0" indent="0" marL="0" algn="ctr">
+                        <a:buNone/>
+                      </a:pPr>
+                      <a:r>
+                        <a:rPr/>
+                        <a:t>Géométries</a:t>
+                      </a:r>
+                    </a:p>
+                  </a:txBody>
+                </a:tc>
+                <a:tc>
+                  <a:txBody>
+                    <a:bodyPr/>
+                    <a:lstStyle/>
+                    <a:p>
+                      <a:pPr lvl="0" indent="0" marL="0" algn="l">
+                        <a:buNone/>
+                      </a:pPr>
+                      <a:r>
+                        <a:rPr>
+                          <a:latin typeface="Courier"/>
+                        </a:rPr>
+                        <a:t>geom_</a:t>
+                      </a:r>
+                    </a:p>
+                  </a:txBody>
+                </a:tc>
+                <a:tc>
+                  <a:txBody>
+                    <a:bodyPr/>
+                    <a:lstStyle/>
+                    <a:p>
+                      <a:pPr lvl="0" indent="0" marL="0" algn="r">
+                        <a:buNone/>
+                      </a:pPr>
+                      <a:r>
+                        <a:rPr/>
+                        <a:t>Les formes à créer pour représenter les données. Cela peut être des points, des lignes, des surfaces etc.</a:t>
+                      </a:r>
+                    </a:p>
+                  </a:txBody>
+                </a:tc>
+              </a:tr>
+              <a:tr h="0">
+                <a:tc>
+                  <a:txBody>
+                    <a:bodyPr/>
+                    <a:lstStyle/>
+                    <a:p>
+                      <a:pPr lvl="0" indent="0" marL="0" algn="ctr">
+                        <a:buNone/>
+                      </a:pPr>
+                      <a:r>
+                        <a:rPr/>
+                        <a:t>Esthétiques</a:t>
+                      </a:r>
+                    </a:p>
+                  </a:txBody>
+                </a:tc>
+                <a:tc>
+                  <a:txBody>
+                    <a:bodyPr/>
+                    <a:lstStyle/>
+                    <a:p>
+                      <a:pPr lvl="0" indent="0" marL="0" algn="l">
+                        <a:buNone/>
+                      </a:pPr>
+                      <a:r>
+                        <a:rPr>
+                          <a:latin typeface="Courier"/>
+                        </a:rPr>
+                        <a:t>aes()</a:t>
+                      </a:r>
+                    </a:p>
+                  </a:txBody>
+                </a:tc>
+                <a:tc>
+                  <a:txBody>
+                    <a:bodyPr/>
+                    <a:lstStyle/>
+                    <a:p>
+                      <a:pPr lvl="0" indent="0" marL="0" algn="r">
+                        <a:buNone/>
+                      </a:pPr>
+                      <a:r>
+                        <a:rPr/>
+                        <a:t>Les paramètres esthétiques de ces formes. Par exemple la position, la couleur, la taille, la forme, la transparence etc.</a:t>
+                      </a:r>
+                    </a:p>
+                  </a:txBody>
+                </a:tc>
+              </a:tr>
+              <a:tr h="0">
+                <a:tc>
+                  <a:txBody>
+                    <a:bodyPr/>
+                    <a:lstStyle/>
+                    <a:p>
+                      <a:pPr lvl="0" indent="0" marL="0" algn="ctr">
+                        <a:buNone/>
+                      </a:pPr>
+                      <a:r>
+                        <a:rPr/>
+                        <a:t>Échelles</a:t>
+                      </a:r>
+                    </a:p>
+                  </a:txBody>
+                </a:tc>
+                <a:tc>
+                  <a:txBody>
+                    <a:bodyPr/>
+                    <a:lstStyle/>
+                    <a:p>
+                      <a:pPr lvl="0" indent="0" marL="0" algn="l">
+                        <a:buNone/>
+                      </a:pPr>
+                      <a:r>
+                        <a:rPr>
+                          <a:latin typeface="Courier"/>
+                        </a:rPr>
+                        <a:t>scale_</a:t>
+                      </a:r>
+                    </a:p>
+                  </a:txBody>
+                </a:tc>
+                <a:tc>
+                  <a:txBody>
+                    <a:bodyPr/>
+                    <a:lstStyle/>
+                    <a:p>
+                      <a:pPr lvl="0" indent="0" marL="0" algn="r">
+                        <a:buNone/>
+                      </a:pPr>
+                      <a:r>
+                        <a:rPr/>
+                        <a:t>Des fonctions permettant de paramétrer la transformation de données en formes ou en objets graphiques. Par exemple la fonction </a:t>
+                      </a:r>
+                      <a:r>
+                        <a:rPr>
+                          <a:latin typeface="Courier"/>
+                        </a:rPr>
+                        <a:t>scale_color_manual</a:t>
+                      </a:r>
+                      <a:r>
+                        <a:rPr/>
+                        <a:t> permet de choisir soi-même les couleurs à utiliser dans un graphique.</a:t>
+                      </a:r>
+                    </a:p>
+                  </a:txBody>
+                </a:tc>
+              </a:tr>
+            </a:tbl>
+          </a:graphicData>
+        </a:graphic>
+      </p:graphicFrame>
     </p:spTree>
   </p:cSld>
 </p:sld>

--- a/01R/99_slides_with_code.pptx
+++ b/01R/99_slides_with_code.pptx
@@ -3185,7 +3185,7 @@
             </a:pPr>
             <a:r>
               <a:rPr/>
-              <a:t>2025-06-01</a:t>
+              <a:t>2025-06-03</a:t>
             </a:r>
           </a:p>
         </p:txBody>
@@ -5916,7 +5916,160 @@
                 </a:solidFill>
                 <a:latin typeface="Courier"/>
               </a:rPr>
-              <a:t> M)</a:t>
+              <a:t> M, </a:t>
+            </a:r>
+            <a:r>
+              <a:rPr>
+                <a:solidFill>
+                  <a:srgbClr val="657422"/>
+                </a:solidFill>
+                <a:latin typeface="Courier"/>
+              </a:rPr>
+              <a:t>color =</a:t>
+            </a:r>
+            <a:r>
+              <a:rPr>
+                <a:solidFill>
+                  <a:srgbClr val="003B4F"/>
+                </a:solidFill>
+                <a:latin typeface="Courier"/>
+              </a:rPr>
+              <a:t> </a:t>
+            </a:r>
+            <a:r>
+              <a:rPr>
+                <a:solidFill>
+                  <a:srgbClr val="AD0000"/>
+                </a:solidFill>
+                <a:latin typeface="Courier"/>
+              </a:rPr>
+              <a:t>1</a:t>
+            </a:r>
+            <a:r>
+              <a:rPr>
+                <a:solidFill>
+                  <a:srgbClr val="5E5E5E"/>
+                </a:solidFill>
+                <a:latin typeface="Courier"/>
+              </a:rPr>
+              <a:t>:</a:t>
+            </a:r>
+            <a:r>
+              <a:rPr>
+                <a:solidFill>
+                  <a:srgbClr val="AD0000"/>
+                </a:solidFill>
+                <a:latin typeface="Courier"/>
+              </a:rPr>
+              <a:t>3</a:t>
+            </a:r>
+            <a:r>
+              <a:rPr>
+                <a:solidFill>
+                  <a:srgbClr val="003B4F"/>
+                </a:solidFill>
+                <a:latin typeface="Courier"/>
+              </a:rPr>
+              <a:t>, </a:t>
+            </a:r>
+            <a:r>
+              <a:rPr>
+                <a:solidFill>
+                  <a:srgbClr val="657422"/>
+                </a:solidFill>
+                <a:latin typeface="Courier"/>
+              </a:rPr>
+              <a:t>legend_breaks =</a:t>
+            </a:r>
+            <a:r>
+              <a:rPr>
+                <a:solidFill>
+                  <a:srgbClr val="003B4F"/>
+                </a:solidFill>
+                <a:latin typeface="Courier"/>
+              </a:rPr>
+              <a:t> </a:t>
+            </a:r>
+            <a:r>
+              <a:rPr>
+                <a:solidFill>
+                  <a:srgbClr val="4758AB"/>
+                </a:solidFill>
+                <a:latin typeface="Courier"/>
+              </a:rPr>
+              <a:t>c</a:t>
+            </a:r>
+            <a:r>
+              <a:rPr>
+                <a:solidFill>
+                  <a:srgbClr val="003B4F"/>
+                </a:solidFill>
+                <a:latin typeface="Courier"/>
+              </a:rPr>
+              <a:t>(</a:t>
+            </a:r>
+            <a:r>
+              <a:rPr>
+                <a:solidFill>
+                  <a:srgbClr val="5E5E5E"/>
+                </a:solidFill>
+                <a:latin typeface="Courier"/>
+              </a:rPr>
+              <a:t>-</a:t>
+            </a:r>
+            <a:r>
+              <a:rPr>
+                <a:solidFill>
+                  <a:srgbClr val="AD0000"/>
+                </a:solidFill>
+                <a:latin typeface="Courier"/>
+              </a:rPr>
+              <a:t>2</a:t>
+            </a:r>
+            <a:r>
+              <a:rPr>
+                <a:solidFill>
+                  <a:srgbClr val="003B4F"/>
+                </a:solidFill>
+                <a:latin typeface="Courier"/>
+              </a:rPr>
+              <a:t>, </a:t>
+            </a:r>
+            <a:r>
+              <a:rPr>
+                <a:solidFill>
+                  <a:srgbClr val="AD0000"/>
+                </a:solidFill>
+                <a:latin typeface="Courier"/>
+              </a:rPr>
+              <a:t>0</a:t>
+            </a:r>
+            <a:r>
+              <a:rPr>
+                <a:solidFill>
+                  <a:srgbClr val="003B4F"/>
+                </a:solidFill>
+                <a:latin typeface="Courier"/>
+              </a:rPr>
+              <a:t>, </a:t>
+            </a:r>
+            <a:r>
+              <a:rPr>
+                <a:solidFill>
+                  <a:srgbClr val="AD0000"/>
+                </a:solidFill>
+                <a:latin typeface="Courier"/>
+              </a:rPr>
+              <a:t>2</a:t>
+            </a:r>
+            <a:r>
+              <a:rPr>
+                <a:solidFill>
+                  <a:srgbClr val="003B4F"/>
+                </a:solidFill>
+                <a:latin typeface="Courier"/>
+              </a:rPr>
+              <a:t>))</a:t>
             </a:r>
           </a:p>
         </p:txBody>
